--- a/make_presentation/templates/templates/flow/no_logo_11.pptx
+++ b/make_presentation/templates/templates/flow/no_logo_11.pptx
@@ -70,20 +70,17 @@
             <a:noAutofit/>
           </a:bodyPr>
           <a:p>
-            <a:r>
-              <a:rPr b="0" lang="en-US" sz="1800" spc="-1" strike="noStrike">
-                <a:solidFill>
-                  <a:srgbClr val="000000"/>
-                </a:solidFill>
-                <a:latin typeface="Calibri"/>
-              </a:rPr>
-              <a:t>Для перемещения страницы щёлкните мышью</a:t>
-            </a:r>
-            <a:endParaRPr b="0" lang="en-US" sz="1800" spc="-1" strike="noStrike">
-              <a:solidFill>
-                <a:srgbClr val="000000"/>
-              </a:solidFill>
-              <a:latin typeface="Calibri"/>
+            <a:pPr algn="ctr">
+              <a:buNone/>
+            </a:pPr>
+            <a:r>
+              <a:rPr b="0" lang="en-US" sz="4400" spc="-1" strike="noStrike">
+                <a:latin typeface="Arial"/>
+              </a:rPr>
+              <a:t>Click to move the slide</a:t>
+            </a:r>
+            <a:endParaRPr b="0" lang="en-US" sz="4400" spc="-1" strike="noStrike">
+              <a:latin typeface="Arial"/>
             </a:endParaRPr>
           </a:p>
         </p:txBody>
@@ -117,12 +114,12 @@
           </a:bodyPr>
           <a:p>
             <a:r>
-              <a:rPr b="0" lang="ru-RU" sz="2000" spc="-1" strike="noStrike">
-                <a:latin typeface="Arial"/>
-              </a:rPr>
-              <a:t>Для правки формата примечаний щёлкните мышью</a:t>
-            </a:r>
-            <a:endParaRPr b="0" lang="ru-RU" sz="2000" spc="-1" strike="noStrike">
+              <a:rPr b="0" lang="en-US" sz="2000" spc="-1" strike="noStrike">
+                <a:latin typeface="Arial"/>
+              </a:rPr>
+              <a:t>Click to edit the notes format</a:t>
+            </a:r>
+            <a:endParaRPr b="0" lang="en-US" sz="2000" spc="-1" strike="noStrike">
               <a:latin typeface="Arial"/>
             </a:endParaRPr>
           </a:p>
@@ -157,12 +154,12 @@
           </a:bodyPr>
           <a:p>
             <a:r>
-              <a:rPr b="0" lang="ru-RU" sz="1400" spc="-1" strike="noStrike">
+              <a:rPr b="0" lang="en-US" sz="1400" spc="-1" strike="noStrike">
                 <a:latin typeface="Times New Roman"/>
               </a:rPr>
-              <a:t>&lt;верхний колонтитул&gt;</a:t>
-            </a:r>
-            <a:endParaRPr b="0" lang="ru-RU" sz="1400" spc="-1" strike="noStrike">
+              <a:t>&lt;header&gt;</a:t>
+            </a:r>
+            <a:endParaRPr b="0" lang="en-US" sz="1400" spc="-1" strike="noStrike">
               <a:latin typeface="Times New Roman"/>
             </a:endParaRPr>
           </a:p>
@@ -198,7 +195,7 @@
           <a:lstStyle>
             <a:lvl1pPr algn="r">
               <a:buNone/>
-              <a:defRPr b="0" lang="ru-RU" sz="1400" spc="-1" strike="noStrike">
+              <a:defRPr b="0" lang="en-US" sz="1400" spc="-1" strike="noStrike">
                 <a:latin typeface="Times New Roman"/>
               </a:defRPr>
             </a:lvl1pPr>
@@ -208,12 +205,12 @@
               <a:buNone/>
             </a:pPr>
             <a:r>
-              <a:rPr b="0" lang="ru-RU" sz="1400" spc="-1" strike="noStrike">
+              <a:rPr b="0" lang="en-US" sz="1400" spc="-1" strike="noStrike">
                 <a:latin typeface="Times New Roman"/>
               </a:rPr>
-              <a:t>&lt;дата/время&gt;</a:t>
-            </a:r>
-            <a:endParaRPr b="0" lang="ru-RU" sz="1400" spc="-1" strike="noStrike">
+              <a:t>&lt;date/time&gt;</a:t>
+            </a:r>
+            <a:endParaRPr b="0" lang="en-US" sz="1400" spc="-1" strike="noStrike">
               <a:latin typeface="Times New Roman"/>
             </a:endParaRPr>
           </a:p>
@@ -248,19 +245,19 @@
           </a:bodyPr>
           <a:lstStyle>
             <a:lvl1pPr>
-              <a:defRPr b="0" lang="ru-RU" sz="1400" spc="-1" strike="noStrike">
+              <a:defRPr b="0" lang="en-US" sz="1400" spc="-1" strike="noStrike">
                 <a:latin typeface="Times New Roman"/>
               </a:defRPr>
             </a:lvl1pPr>
           </a:lstStyle>
           <a:p>
             <a:r>
-              <a:rPr b="0" lang="ru-RU" sz="1400" spc="-1" strike="noStrike">
+              <a:rPr b="0" lang="en-US" sz="1400" spc="-1" strike="noStrike">
                 <a:latin typeface="Times New Roman"/>
               </a:rPr>
-              <a:t>&lt;нижний колонтитул&gt;</a:t>
-            </a:r>
-            <a:endParaRPr b="0" lang="ru-RU" sz="1400" spc="-1" strike="noStrike">
+              <a:t>&lt;footer&gt;</a:t>
+            </a:r>
+            <a:endParaRPr b="0" lang="en-US" sz="1400" spc="-1" strike="noStrike">
               <a:latin typeface="Times New Roman"/>
             </a:endParaRPr>
           </a:p>
@@ -296,7 +293,7 @@
           <a:lstStyle>
             <a:lvl1pPr algn="r">
               <a:buNone/>
-              <a:defRPr b="0" lang="ru-RU" sz="1400" spc="-1" strike="noStrike">
+              <a:defRPr b="0" lang="en-US" sz="1400" spc="-1" strike="noStrike">
                 <a:latin typeface="Times New Roman"/>
               </a:defRPr>
             </a:lvl1pPr>
@@ -305,13 +302,13 @@
             <a:pPr algn="r">
               <a:buNone/>
             </a:pPr>
-            <a:fld id="{5E399894-1E1E-4209-A75B-F04FF9944F00}" type="slidenum">
-              <a:rPr b="0" lang="ru-RU" sz="1400" spc="-1" strike="noStrike">
+            <a:fld id="{FFAF08B9-A6EC-4508-BCA7-BB59CD0BC756}" type="slidenum">
+              <a:rPr b="0" lang="en-US" sz="1400" spc="-1" strike="noStrike">
                 <a:latin typeface="Times New Roman"/>
               </a:rPr>
-              <a:t>&lt;номер&gt;</a:t>
+              <a:t>&lt;number&gt;</a:t>
             </a:fld>
-            <a:endParaRPr b="0" lang="ru-RU" sz="1400" spc="-1" strike="noStrike">
+            <a:endParaRPr b="0" lang="en-US" sz="1400" spc="-1" strike="noStrike">
               <a:latin typeface="Times New Roman"/>
             </a:endParaRPr>
           </a:p>
@@ -342,7 +339,7 @@
       </p:grpSpPr>
       <p:sp>
         <p:nvSpPr>
-          <p:cNvPr id="169" name="PlaceHolder 1"/>
+          <p:cNvPr id="168" name="PlaceHolder 1"/>
           <p:cNvSpPr>
             <a:spLocks noGrp="1"/>
           </p:cNvSpPr>
@@ -353,19 +350,19 @@
         <p:spPr>
           <a:xfrm>
             <a:off x="685800" y="1143000"/>
-            <a:ext cx="5486040" cy="3085920"/>
-          </a:xfrm>
-          <a:prstGeom prst="rect">
-            <a:avLst/>
-          </a:prstGeom>
-          <a:ln w="0">
-            <a:noFill/>
-          </a:ln>
-        </p:spPr>
-      </p:sp>
-      <p:sp>
-        <p:nvSpPr>
-          <p:cNvPr id="170" name="PlaceHolder 2"/>
+            <a:ext cx="5485680" cy="3085560"/>
+          </a:xfrm>
+          <a:prstGeom prst="rect">
+            <a:avLst/>
+          </a:prstGeom>
+          <a:ln w="0">
+            <a:noFill/>
+          </a:ln>
+        </p:spPr>
+      </p:sp>
+      <p:sp>
+        <p:nvSpPr>
+          <p:cNvPr id="169" name="PlaceHolder 2"/>
           <p:cNvSpPr>
             <a:spLocks noGrp="1"/>
           </p:cNvSpPr>
@@ -376,30 +373,30 @@
         <p:spPr>
           <a:xfrm>
             <a:off x="685800" y="4400640"/>
-            <a:ext cx="5486040" cy="3600000"/>
-          </a:xfrm>
-          <a:prstGeom prst="rect">
-            <a:avLst/>
-          </a:prstGeom>
-          <a:noFill/>
-          <a:ln w="0">
-            <a:noFill/>
-          </a:ln>
-        </p:spPr>
-        <p:txBody>
-          <a:bodyPr anchor="t">
-            <a:noAutofit/>
-          </a:bodyPr>
-          <a:p>
-            <a:endParaRPr b="0" lang="ru-RU" sz="2000" spc="-1" strike="noStrike">
-              <a:latin typeface="Arial"/>
-            </a:endParaRPr>
-          </a:p>
-        </p:txBody>
-      </p:sp>
-      <p:sp>
-        <p:nvSpPr>
-          <p:cNvPr id="171" name="PlaceHolder 3"/>
+            <a:ext cx="5485680" cy="3599640"/>
+          </a:xfrm>
+          <a:prstGeom prst="rect">
+            <a:avLst/>
+          </a:prstGeom>
+          <a:noFill/>
+          <a:ln w="0">
+            <a:noFill/>
+          </a:ln>
+        </p:spPr>
+        <p:txBody>
+          <a:bodyPr lIns="0" rIns="0" tIns="0" bIns="0" anchor="t">
+            <a:noAutofit/>
+          </a:bodyPr>
+          <a:p>
+            <a:endParaRPr b="0" lang="en-US" sz="2000" spc="-1" strike="noStrike">
+              <a:latin typeface="Arial"/>
+            </a:endParaRPr>
+          </a:p>
+        </p:txBody>
+      </p:sp>
+      <p:sp>
+        <p:nvSpPr>
+          <p:cNvPr id="170" name="PlaceHolder 3"/>
           <p:cNvSpPr>
             <a:spLocks noGrp="1"/>
           </p:cNvSpPr>
@@ -410,18 +407,18 @@
         <p:spPr>
           <a:xfrm>
             <a:off x="3884760" y="8685360"/>
-            <a:ext cx="2971440" cy="458280"/>
-          </a:xfrm>
-          <a:prstGeom prst="rect">
-            <a:avLst/>
-          </a:prstGeom>
-          <a:noFill/>
-          <a:ln w="0">
-            <a:noFill/>
-          </a:ln>
-        </p:spPr>
-        <p:txBody>
-          <a:bodyPr anchor="b">
+            <a:ext cx="2971080" cy="457920"/>
+          </a:xfrm>
+          <a:prstGeom prst="rect">
+            <a:avLst/>
+          </a:prstGeom>
+          <a:noFill/>
+          <a:ln w="0">
+            <a:noFill/>
+          </a:ln>
+        </p:spPr>
+        <p:txBody>
+          <a:bodyPr lIns="0" rIns="0" tIns="0" bIns="0" anchor="b">
             <a:noAutofit/>
           </a:bodyPr>
           <a:lstStyle>
@@ -442,13 +439,13 @@
               </a:lnSpc>
               <a:buNone/>
             </a:pPr>
-            <a:fld id="{6382FB80-C0E7-4144-919E-F5ECB4E9F959}" type="slidenum">
+            <a:fld id="{9CD4FF0E-D44C-4ADA-B50F-882FE63F97E8}" type="slidenum">
               <a:rPr b="0" lang="ru-RU" sz="1200" spc="-1" strike="noStrike">
                 <a:latin typeface="Times New Roman"/>
               </a:rPr>
-              <a:t>&lt;номер&gt;</a:t>
+              <a:t>&lt;number&gt;</a:t>
             </a:fld>
-            <a:endParaRPr b="0" lang="ru-RU" sz="1200" spc="-1" strike="noStrike">
+            <a:endParaRPr b="0" lang="en-US" sz="1200" spc="-1" strike="noStrike">
               <a:latin typeface="Times New Roman"/>
             </a:endParaRPr>
           </a:p>
@@ -478,7 +475,7 @@
       </p:grpSpPr>
       <p:sp>
         <p:nvSpPr>
-          <p:cNvPr id="160" name="PlaceHolder 1"/>
+          <p:cNvPr id="159" name="PlaceHolder 1"/>
           <p:cNvSpPr>
             <a:spLocks noGrp="1"/>
           </p:cNvSpPr>
@@ -489,19 +486,19 @@
         <p:spPr>
           <a:xfrm>
             <a:off x="685800" y="1143000"/>
-            <a:ext cx="5486040" cy="3085920"/>
-          </a:xfrm>
-          <a:prstGeom prst="rect">
-            <a:avLst/>
-          </a:prstGeom>
-          <a:ln w="0">
-            <a:noFill/>
-          </a:ln>
-        </p:spPr>
-      </p:sp>
-      <p:sp>
-        <p:nvSpPr>
-          <p:cNvPr id="161" name="PlaceHolder 2"/>
+            <a:ext cx="5485680" cy="3085560"/>
+          </a:xfrm>
+          <a:prstGeom prst="rect">
+            <a:avLst/>
+          </a:prstGeom>
+          <a:ln w="0">
+            <a:noFill/>
+          </a:ln>
+        </p:spPr>
+      </p:sp>
+      <p:sp>
+        <p:nvSpPr>
+          <p:cNvPr id="160" name="PlaceHolder 2"/>
           <p:cNvSpPr>
             <a:spLocks noGrp="1"/>
           </p:cNvSpPr>
@@ -512,30 +509,30 @@
         <p:spPr>
           <a:xfrm>
             <a:off x="685800" y="4400640"/>
-            <a:ext cx="5486040" cy="3600000"/>
-          </a:xfrm>
-          <a:prstGeom prst="rect">
-            <a:avLst/>
-          </a:prstGeom>
-          <a:noFill/>
-          <a:ln w="0">
-            <a:noFill/>
-          </a:ln>
-        </p:spPr>
-        <p:txBody>
-          <a:bodyPr anchor="t">
-            <a:noAutofit/>
-          </a:bodyPr>
-          <a:p>
-            <a:endParaRPr b="0" lang="ru-RU" sz="2000" spc="-1" strike="noStrike">
-              <a:latin typeface="Arial"/>
-            </a:endParaRPr>
-          </a:p>
-        </p:txBody>
-      </p:sp>
-      <p:sp>
-        <p:nvSpPr>
-          <p:cNvPr id="162" name="PlaceHolder 3"/>
+            <a:ext cx="5485680" cy="3599640"/>
+          </a:xfrm>
+          <a:prstGeom prst="rect">
+            <a:avLst/>
+          </a:prstGeom>
+          <a:noFill/>
+          <a:ln w="0">
+            <a:noFill/>
+          </a:ln>
+        </p:spPr>
+        <p:txBody>
+          <a:bodyPr lIns="0" rIns="0" tIns="0" bIns="0" anchor="t">
+            <a:noAutofit/>
+          </a:bodyPr>
+          <a:p>
+            <a:endParaRPr b="0" lang="en-US" sz="2000" spc="-1" strike="noStrike">
+              <a:latin typeface="Arial"/>
+            </a:endParaRPr>
+          </a:p>
+        </p:txBody>
+      </p:sp>
+      <p:sp>
+        <p:nvSpPr>
+          <p:cNvPr id="161" name="PlaceHolder 3"/>
           <p:cNvSpPr>
             <a:spLocks noGrp="1"/>
           </p:cNvSpPr>
@@ -546,18 +543,18 @@
         <p:spPr>
           <a:xfrm>
             <a:off x="3884760" y="8685360"/>
-            <a:ext cx="2971440" cy="458280"/>
-          </a:xfrm>
-          <a:prstGeom prst="rect">
-            <a:avLst/>
-          </a:prstGeom>
-          <a:noFill/>
-          <a:ln w="0">
-            <a:noFill/>
-          </a:ln>
-        </p:spPr>
-        <p:txBody>
-          <a:bodyPr anchor="b">
+            <a:ext cx="2971080" cy="457920"/>
+          </a:xfrm>
+          <a:prstGeom prst="rect">
+            <a:avLst/>
+          </a:prstGeom>
+          <a:noFill/>
+          <a:ln w="0">
+            <a:noFill/>
+          </a:ln>
+        </p:spPr>
+        <p:txBody>
+          <a:bodyPr lIns="0" rIns="0" tIns="0" bIns="0" anchor="b">
             <a:noAutofit/>
           </a:bodyPr>
           <a:lstStyle>
@@ -578,13 +575,13 @@
               </a:lnSpc>
               <a:buNone/>
             </a:pPr>
-            <a:fld id="{97532744-EB08-4789-BFC7-5B53F5B87F51}" type="slidenum">
+            <a:fld id="{0530A850-5FDE-48E4-9D3E-740AE1F6D675}" type="slidenum">
               <a:rPr b="0" lang="ru-RU" sz="1200" spc="-1" strike="noStrike">
                 <a:latin typeface="Times New Roman"/>
               </a:rPr>
-              <a:t>&lt;номер&gt;</a:t>
+              <a:t>&lt;number&gt;</a:t>
             </a:fld>
-            <a:endParaRPr b="0" lang="ru-RU" sz="1200" spc="-1" strike="noStrike">
+            <a:endParaRPr b="0" lang="en-US" sz="1200" spc="-1" strike="noStrike">
               <a:latin typeface="Times New Roman"/>
             </a:endParaRPr>
           </a:p>
@@ -614,7 +611,7 @@
       </p:grpSpPr>
       <p:sp>
         <p:nvSpPr>
-          <p:cNvPr id="163" name="PlaceHolder 1"/>
+          <p:cNvPr id="162" name="PlaceHolder 1"/>
           <p:cNvSpPr>
             <a:spLocks noGrp="1"/>
           </p:cNvSpPr>
@@ -625,19 +622,19 @@
         <p:spPr>
           <a:xfrm>
             <a:off x="685800" y="1143000"/>
-            <a:ext cx="5486040" cy="3085920"/>
-          </a:xfrm>
-          <a:prstGeom prst="rect">
-            <a:avLst/>
-          </a:prstGeom>
-          <a:ln w="0">
-            <a:noFill/>
-          </a:ln>
-        </p:spPr>
-      </p:sp>
-      <p:sp>
-        <p:nvSpPr>
-          <p:cNvPr id="164" name="PlaceHolder 2"/>
+            <a:ext cx="5485680" cy="3085560"/>
+          </a:xfrm>
+          <a:prstGeom prst="rect">
+            <a:avLst/>
+          </a:prstGeom>
+          <a:ln w="0">
+            <a:noFill/>
+          </a:ln>
+        </p:spPr>
+      </p:sp>
+      <p:sp>
+        <p:nvSpPr>
+          <p:cNvPr id="163" name="PlaceHolder 2"/>
           <p:cNvSpPr>
             <a:spLocks noGrp="1"/>
           </p:cNvSpPr>
@@ -648,30 +645,30 @@
         <p:spPr>
           <a:xfrm>
             <a:off x="685800" y="4400640"/>
-            <a:ext cx="5486040" cy="3600000"/>
-          </a:xfrm>
-          <a:prstGeom prst="rect">
-            <a:avLst/>
-          </a:prstGeom>
-          <a:noFill/>
-          <a:ln w="0">
-            <a:noFill/>
-          </a:ln>
-        </p:spPr>
-        <p:txBody>
-          <a:bodyPr anchor="t">
-            <a:noAutofit/>
-          </a:bodyPr>
-          <a:p>
-            <a:endParaRPr b="0" lang="ru-RU" sz="2000" spc="-1" strike="noStrike">
-              <a:latin typeface="Arial"/>
-            </a:endParaRPr>
-          </a:p>
-        </p:txBody>
-      </p:sp>
-      <p:sp>
-        <p:nvSpPr>
-          <p:cNvPr id="165" name="PlaceHolder 3"/>
+            <a:ext cx="5485680" cy="3599640"/>
+          </a:xfrm>
+          <a:prstGeom prst="rect">
+            <a:avLst/>
+          </a:prstGeom>
+          <a:noFill/>
+          <a:ln w="0">
+            <a:noFill/>
+          </a:ln>
+        </p:spPr>
+        <p:txBody>
+          <a:bodyPr lIns="0" rIns="0" tIns="0" bIns="0" anchor="t">
+            <a:noAutofit/>
+          </a:bodyPr>
+          <a:p>
+            <a:endParaRPr b="0" lang="en-US" sz="2000" spc="-1" strike="noStrike">
+              <a:latin typeface="Arial"/>
+            </a:endParaRPr>
+          </a:p>
+        </p:txBody>
+      </p:sp>
+      <p:sp>
+        <p:nvSpPr>
+          <p:cNvPr id="164" name="PlaceHolder 3"/>
           <p:cNvSpPr>
             <a:spLocks noGrp="1"/>
           </p:cNvSpPr>
@@ -682,18 +679,18 @@
         <p:spPr>
           <a:xfrm>
             <a:off x="3884760" y="8685360"/>
-            <a:ext cx="2971440" cy="458280"/>
-          </a:xfrm>
-          <a:prstGeom prst="rect">
-            <a:avLst/>
-          </a:prstGeom>
-          <a:noFill/>
-          <a:ln w="0">
-            <a:noFill/>
-          </a:ln>
-        </p:spPr>
-        <p:txBody>
-          <a:bodyPr anchor="b">
+            <a:ext cx="2971080" cy="457920"/>
+          </a:xfrm>
+          <a:prstGeom prst="rect">
+            <a:avLst/>
+          </a:prstGeom>
+          <a:noFill/>
+          <a:ln w="0">
+            <a:noFill/>
+          </a:ln>
+        </p:spPr>
+        <p:txBody>
+          <a:bodyPr lIns="0" rIns="0" tIns="0" bIns="0" anchor="b">
             <a:noAutofit/>
           </a:bodyPr>
           <a:lstStyle>
@@ -714,13 +711,13 @@
               </a:lnSpc>
               <a:buNone/>
             </a:pPr>
-            <a:fld id="{15F8D44A-9B36-437B-8DAA-53A5CF7D305D}" type="slidenum">
+            <a:fld id="{5252F88C-2B6C-4496-A45D-60F3892C03C8}" type="slidenum">
               <a:rPr b="0" lang="ru-RU" sz="1200" spc="-1" strike="noStrike">
                 <a:latin typeface="Times New Roman"/>
               </a:rPr>
-              <a:t>&lt;номер&gt;</a:t>
+              <a:t>&lt;number&gt;</a:t>
             </a:fld>
-            <a:endParaRPr b="0" lang="ru-RU" sz="1200" spc="-1" strike="noStrike">
+            <a:endParaRPr b="0" lang="en-US" sz="1200" spc="-1" strike="noStrike">
               <a:latin typeface="Times New Roman"/>
             </a:endParaRPr>
           </a:p>
@@ -750,7 +747,7 @@
       </p:grpSpPr>
       <p:sp>
         <p:nvSpPr>
-          <p:cNvPr id="166" name="PlaceHolder 1"/>
+          <p:cNvPr id="165" name="PlaceHolder 1"/>
           <p:cNvSpPr>
             <a:spLocks noGrp="1"/>
           </p:cNvSpPr>
@@ -761,19 +758,19 @@
         <p:spPr>
           <a:xfrm>
             <a:off x="685800" y="1143000"/>
-            <a:ext cx="5486040" cy="3085920"/>
-          </a:xfrm>
-          <a:prstGeom prst="rect">
-            <a:avLst/>
-          </a:prstGeom>
-          <a:ln w="0">
-            <a:noFill/>
-          </a:ln>
-        </p:spPr>
-      </p:sp>
-      <p:sp>
-        <p:nvSpPr>
-          <p:cNvPr id="167" name="PlaceHolder 2"/>
+            <a:ext cx="5485680" cy="3085560"/>
+          </a:xfrm>
+          <a:prstGeom prst="rect">
+            <a:avLst/>
+          </a:prstGeom>
+          <a:ln w="0">
+            <a:noFill/>
+          </a:ln>
+        </p:spPr>
+      </p:sp>
+      <p:sp>
+        <p:nvSpPr>
+          <p:cNvPr id="166" name="PlaceHolder 2"/>
           <p:cNvSpPr>
             <a:spLocks noGrp="1"/>
           </p:cNvSpPr>
@@ -784,30 +781,30 @@
         <p:spPr>
           <a:xfrm>
             <a:off x="685800" y="4400640"/>
-            <a:ext cx="5486040" cy="3600000"/>
-          </a:xfrm>
-          <a:prstGeom prst="rect">
-            <a:avLst/>
-          </a:prstGeom>
-          <a:noFill/>
-          <a:ln w="0">
-            <a:noFill/>
-          </a:ln>
-        </p:spPr>
-        <p:txBody>
-          <a:bodyPr anchor="t">
-            <a:noAutofit/>
-          </a:bodyPr>
-          <a:p>
-            <a:endParaRPr b="0" lang="ru-RU" sz="2000" spc="-1" strike="noStrike">
-              <a:latin typeface="Arial"/>
-            </a:endParaRPr>
-          </a:p>
-        </p:txBody>
-      </p:sp>
-      <p:sp>
-        <p:nvSpPr>
-          <p:cNvPr id="168" name="PlaceHolder 3"/>
+            <a:ext cx="5485680" cy="3599640"/>
+          </a:xfrm>
+          <a:prstGeom prst="rect">
+            <a:avLst/>
+          </a:prstGeom>
+          <a:noFill/>
+          <a:ln w="0">
+            <a:noFill/>
+          </a:ln>
+        </p:spPr>
+        <p:txBody>
+          <a:bodyPr lIns="0" rIns="0" tIns="0" bIns="0" anchor="t">
+            <a:noAutofit/>
+          </a:bodyPr>
+          <a:p>
+            <a:endParaRPr b="0" lang="en-US" sz="2000" spc="-1" strike="noStrike">
+              <a:latin typeface="Arial"/>
+            </a:endParaRPr>
+          </a:p>
+        </p:txBody>
+      </p:sp>
+      <p:sp>
+        <p:nvSpPr>
+          <p:cNvPr id="167" name="PlaceHolder 3"/>
           <p:cNvSpPr>
             <a:spLocks noGrp="1"/>
           </p:cNvSpPr>
@@ -818,18 +815,18 @@
         <p:spPr>
           <a:xfrm>
             <a:off x="3884760" y="8685360"/>
-            <a:ext cx="2971440" cy="458280"/>
-          </a:xfrm>
-          <a:prstGeom prst="rect">
-            <a:avLst/>
-          </a:prstGeom>
-          <a:noFill/>
-          <a:ln w="0">
-            <a:noFill/>
-          </a:ln>
-        </p:spPr>
-        <p:txBody>
-          <a:bodyPr anchor="b">
+            <a:ext cx="2971080" cy="457920"/>
+          </a:xfrm>
+          <a:prstGeom prst="rect">
+            <a:avLst/>
+          </a:prstGeom>
+          <a:noFill/>
+          <a:ln w="0">
+            <a:noFill/>
+          </a:ln>
+        </p:spPr>
+        <p:txBody>
+          <a:bodyPr lIns="0" rIns="0" tIns="0" bIns="0" anchor="b">
             <a:noAutofit/>
           </a:bodyPr>
           <a:lstStyle>
@@ -850,13 +847,13 @@
               </a:lnSpc>
               <a:buNone/>
             </a:pPr>
-            <a:fld id="{FD73BDDD-259C-4240-8906-7979CDB3474E}" type="slidenum">
+            <a:fld id="{39269C0B-3A38-4260-A768-58870AF6CC1E}" type="slidenum">
               <a:rPr b="0" lang="ru-RU" sz="1200" spc="-1" strike="noStrike">
                 <a:latin typeface="Times New Roman"/>
               </a:rPr>
-              <a:t>&lt;номер&gt;</a:t>
+              <a:t>&lt;number&gt;</a:t>
             </a:fld>
-            <a:endParaRPr b="0" lang="ru-RU" sz="1200" spc="-1" strike="noStrike">
+            <a:endParaRPr b="0" lang="en-US" sz="1200" spc="-1" strike="noStrike">
               <a:latin typeface="Times New Roman"/>
             </a:endParaRPr>
           </a:p>
@@ -891,7 +888,7 @@
             <a:spLocks noGrp="1"/>
           </p:cNvSpPr>
           <p:nvPr>
-            <p:ph type="ftr" idx="2"/>
+            <p:ph type="ftr" idx="1"/>
           </p:nvPr>
         </p:nvSpPr>
         <p:spPr/>
@@ -911,14 +908,14 @@
             <a:spLocks noGrp="1"/>
           </p:cNvSpPr>
           <p:nvPr>
-            <p:ph type="sldNum" idx="3"/>
+            <p:ph type="sldNum" idx="2"/>
           </p:nvPr>
         </p:nvSpPr>
         <p:spPr/>
         <p:txBody>
           <a:bodyPr/>
           <a:p>
-            <a:fld id="{80BB9A33-76BF-4F70-8512-5A212E6BDECE}" type="slidenum">
+            <a:fld id="{1B87F645-2E88-4E75-9291-2BC0C220D783}" type="slidenum">
               <a:t>&lt;#&gt;</a:t>
             </a:fld>
           </a:p>
@@ -931,7 +928,7 @@
             <a:spLocks noGrp="1"/>
           </p:cNvSpPr>
           <p:nvPr>
-            <p:ph type="dt" idx="1"/>
+            <p:ph type="dt" idx="3"/>
           </p:nvPr>
         </p:nvSpPr>
         <p:spPr/>
@@ -939,7 +936,7 @@
           <a:bodyPr/>
           <a:p>
             <a:r>
-              <a:rPr lang="ru-RU"/>
+              <a:rPr lang="en-US"/>
               <a:t/>
             </a:r>
           </a:p>
@@ -980,7 +977,7 @@
         <p:spPr>
           <a:xfrm>
             <a:off x="1143000" y="841680"/>
-            <a:ext cx="6857640" cy="1790280"/>
+            <a:ext cx="6857280" cy="1789920"/>
           </a:xfrm>
           <a:prstGeom prst="rect">
             <a:avLst/>
@@ -995,11 +992,11 @@
             <a:noAutofit/>
           </a:bodyPr>
           <a:p>
-            <a:endParaRPr b="0" lang="en-US" sz="1800" spc="-1" strike="noStrike">
-              <a:solidFill>
-                <a:srgbClr val="000000"/>
-              </a:solidFill>
-              <a:latin typeface="Calibri"/>
+            <a:pPr algn="ctr">
+              <a:buNone/>
+            </a:pPr>
+            <a:endParaRPr b="0" lang="en-US" sz="4400" spc="-1" strike="noStrike">
+              <a:latin typeface="Arial"/>
             </a:endParaRPr>
           </a:p>
         </p:txBody>
@@ -1032,20 +1029,8 @@
             <a:normAutofit/>
           </a:bodyPr>
           <a:p>
-            <a:pPr>
-              <a:lnSpc>
-                <a:spcPct val="90000"/>
-              </a:lnSpc>
-              <a:spcBef>
-                <a:spcPts val="1417"/>
-              </a:spcBef>
-              <a:buNone/>
-            </a:pPr>
-            <a:endParaRPr b="0" lang="en-US" sz="2100" spc="-1" strike="noStrike">
-              <a:solidFill>
-                <a:srgbClr val="000000"/>
-              </a:solidFill>
-              <a:latin typeface="Calibri"/>
+            <a:endParaRPr b="0" lang="en-US" sz="3200" spc="-1" strike="noStrike">
+              <a:latin typeface="Arial"/>
             </a:endParaRPr>
           </a:p>
         </p:txBody>
@@ -1078,20 +1063,8 @@
             <a:normAutofit/>
           </a:bodyPr>
           <a:p>
-            <a:pPr>
-              <a:lnSpc>
-                <a:spcPct val="90000"/>
-              </a:lnSpc>
-              <a:spcBef>
-                <a:spcPts val="1417"/>
-              </a:spcBef>
-              <a:buNone/>
-            </a:pPr>
-            <a:endParaRPr b="0" lang="en-US" sz="2100" spc="-1" strike="noStrike">
-              <a:solidFill>
-                <a:srgbClr val="000000"/>
-              </a:solidFill>
-              <a:latin typeface="Calibri"/>
+            <a:endParaRPr b="0" lang="en-US" sz="3200" spc="-1" strike="noStrike">
+              <a:latin typeface="Arial"/>
             </a:endParaRPr>
           </a:p>
         </p:txBody>
@@ -1103,7 +1076,7 @@
             <a:spLocks noGrp="1"/>
           </p:cNvSpPr>
           <p:nvPr>
-            <p:ph type="ftr" idx="2"/>
+            <p:ph type="ftr" idx="1"/>
           </p:nvPr>
         </p:nvSpPr>
         <p:spPr/>
@@ -1123,14 +1096,14 @@
             <a:spLocks noGrp="1"/>
           </p:cNvSpPr>
           <p:nvPr>
-            <p:ph type="sldNum" idx="3"/>
+            <p:ph type="sldNum" idx="2"/>
           </p:nvPr>
         </p:nvSpPr>
         <p:spPr/>
         <p:txBody>
           <a:bodyPr/>
           <a:p>
-            <a:fld id="{69317E91-DEE5-4956-A1D2-02A0DDA6C2C7}" type="slidenum">
+            <a:fld id="{0B33786F-7492-4B97-BCED-ED4535DEB391}" type="slidenum">
               <a:t>&lt;#&gt;</a:t>
             </a:fld>
           </a:p>
@@ -1143,7 +1116,7 @@
             <a:spLocks noGrp="1"/>
           </p:cNvSpPr>
           <p:nvPr>
-            <p:ph type="dt" idx="1"/>
+            <p:ph type="dt" idx="3"/>
           </p:nvPr>
         </p:nvSpPr>
         <p:spPr/>
@@ -1151,7 +1124,7 @@
           <a:bodyPr/>
           <a:p>
             <a:r>
-              <a:rPr lang="ru-RU"/>
+              <a:rPr lang="en-US"/>
               <a:t/>
             </a:r>
           </a:p>
@@ -1192,7 +1165,7 @@
         <p:spPr>
           <a:xfrm>
             <a:off x="1143000" y="841680"/>
-            <a:ext cx="6857640" cy="1790280"/>
+            <a:ext cx="6857280" cy="1789920"/>
           </a:xfrm>
           <a:prstGeom prst="rect">
             <a:avLst/>
@@ -1207,11 +1180,11 @@
             <a:noAutofit/>
           </a:bodyPr>
           <a:p>
-            <a:endParaRPr b="0" lang="en-US" sz="1800" spc="-1" strike="noStrike">
-              <a:solidFill>
-                <a:srgbClr val="000000"/>
-              </a:solidFill>
-              <a:latin typeface="Calibri"/>
+            <a:pPr algn="ctr">
+              <a:buNone/>
+            </a:pPr>
+            <a:endParaRPr b="0" lang="en-US" sz="4400" spc="-1" strike="noStrike">
+              <a:latin typeface="Arial"/>
             </a:endParaRPr>
           </a:p>
         </p:txBody>
@@ -1244,20 +1217,8 @@
             <a:normAutofit/>
           </a:bodyPr>
           <a:p>
-            <a:pPr>
-              <a:lnSpc>
-                <a:spcPct val="90000"/>
-              </a:lnSpc>
-              <a:spcBef>
-                <a:spcPts val="1417"/>
-              </a:spcBef>
-              <a:buNone/>
-            </a:pPr>
-            <a:endParaRPr b="0" lang="en-US" sz="2100" spc="-1" strike="noStrike">
-              <a:solidFill>
-                <a:srgbClr val="000000"/>
-              </a:solidFill>
-              <a:latin typeface="Calibri"/>
+            <a:endParaRPr b="0" lang="en-US" sz="3200" spc="-1" strike="noStrike">
+              <a:latin typeface="Arial"/>
             </a:endParaRPr>
           </a:p>
         </p:txBody>
@@ -1290,20 +1251,8 @@
             <a:normAutofit/>
           </a:bodyPr>
           <a:p>
-            <a:pPr>
-              <a:lnSpc>
-                <a:spcPct val="90000"/>
-              </a:lnSpc>
-              <a:spcBef>
-                <a:spcPts val="1417"/>
-              </a:spcBef>
-              <a:buNone/>
-            </a:pPr>
-            <a:endParaRPr b="0" lang="en-US" sz="2100" spc="-1" strike="noStrike">
-              <a:solidFill>
-                <a:srgbClr val="000000"/>
-              </a:solidFill>
-              <a:latin typeface="Calibri"/>
+            <a:endParaRPr b="0" lang="en-US" sz="3200" spc="-1" strike="noStrike">
+              <a:latin typeface="Arial"/>
             </a:endParaRPr>
           </a:p>
         </p:txBody>
@@ -1336,20 +1285,8 @@
             <a:normAutofit/>
           </a:bodyPr>
           <a:p>
-            <a:pPr>
-              <a:lnSpc>
-                <a:spcPct val="90000"/>
-              </a:lnSpc>
-              <a:spcBef>
-                <a:spcPts val="1417"/>
-              </a:spcBef>
-              <a:buNone/>
-            </a:pPr>
-            <a:endParaRPr b="0" lang="en-US" sz="2100" spc="-1" strike="noStrike">
-              <a:solidFill>
-                <a:srgbClr val="000000"/>
-              </a:solidFill>
-              <a:latin typeface="Calibri"/>
+            <a:endParaRPr b="0" lang="en-US" sz="3200" spc="-1" strike="noStrike">
+              <a:latin typeface="Arial"/>
             </a:endParaRPr>
           </a:p>
         </p:txBody>
@@ -1382,20 +1319,8 @@
             <a:normAutofit/>
           </a:bodyPr>
           <a:p>
-            <a:pPr>
-              <a:lnSpc>
-                <a:spcPct val="90000"/>
-              </a:lnSpc>
-              <a:spcBef>
-                <a:spcPts val="1417"/>
-              </a:spcBef>
-              <a:buNone/>
-            </a:pPr>
-            <a:endParaRPr b="0" lang="en-US" sz="2100" spc="-1" strike="noStrike">
-              <a:solidFill>
-                <a:srgbClr val="000000"/>
-              </a:solidFill>
-              <a:latin typeface="Calibri"/>
+            <a:endParaRPr b="0" lang="en-US" sz="3200" spc="-1" strike="noStrike">
+              <a:latin typeface="Arial"/>
             </a:endParaRPr>
           </a:p>
         </p:txBody>
@@ -1407,7 +1332,7 @@
             <a:spLocks noGrp="1"/>
           </p:cNvSpPr>
           <p:nvPr>
-            <p:ph type="ftr" idx="2"/>
+            <p:ph type="ftr" idx="1"/>
           </p:nvPr>
         </p:nvSpPr>
         <p:spPr/>
@@ -1427,14 +1352,14 @@
             <a:spLocks noGrp="1"/>
           </p:cNvSpPr>
           <p:nvPr>
-            <p:ph type="sldNum" idx="3"/>
+            <p:ph type="sldNum" idx="2"/>
           </p:nvPr>
         </p:nvSpPr>
         <p:spPr/>
         <p:txBody>
           <a:bodyPr/>
           <a:p>
-            <a:fld id="{1026AF82-E075-4168-A27C-8EB91B939DF8}" type="slidenum">
+            <a:fld id="{CD4103CE-C869-49D1-BBE3-F2E3BD5305D8}" type="slidenum">
               <a:t>&lt;#&gt;</a:t>
             </a:fld>
           </a:p>
@@ -1447,7 +1372,7 @@
             <a:spLocks noGrp="1"/>
           </p:cNvSpPr>
           <p:nvPr>
-            <p:ph type="dt" idx="1"/>
+            <p:ph type="dt" idx="3"/>
           </p:nvPr>
         </p:nvSpPr>
         <p:spPr/>
@@ -1455,7 +1380,7 @@
           <a:bodyPr/>
           <a:p>
             <a:r>
-              <a:rPr lang="ru-RU"/>
+              <a:rPr lang="en-US"/>
               <a:t/>
             </a:r>
           </a:p>
@@ -1496,7 +1421,7 @@
         <p:spPr>
           <a:xfrm>
             <a:off x="1143000" y="841680"/>
-            <a:ext cx="6857640" cy="1790280"/>
+            <a:ext cx="6857280" cy="1789920"/>
           </a:xfrm>
           <a:prstGeom prst="rect">
             <a:avLst/>
@@ -1511,11 +1436,11 @@
             <a:noAutofit/>
           </a:bodyPr>
           <a:p>
-            <a:endParaRPr b="0" lang="en-US" sz="1800" spc="-1" strike="noStrike">
-              <a:solidFill>
-                <a:srgbClr val="000000"/>
-              </a:solidFill>
-              <a:latin typeface="Calibri"/>
+            <a:pPr algn="ctr">
+              <a:buNone/>
+            </a:pPr>
+            <a:endParaRPr b="0" lang="en-US" sz="4400" spc="-1" strike="noStrike">
+              <a:latin typeface="Arial"/>
             </a:endParaRPr>
           </a:p>
         </p:txBody>
@@ -1548,20 +1473,8 @@
             <a:normAutofit/>
           </a:bodyPr>
           <a:p>
-            <a:pPr>
-              <a:lnSpc>
-                <a:spcPct val="90000"/>
-              </a:lnSpc>
-              <a:spcBef>
-                <a:spcPts val="1417"/>
-              </a:spcBef>
-              <a:buNone/>
-            </a:pPr>
-            <a:endParaRPr b="0" lang="en-US" sz="2100" spc="-1" strike="noStrike">
-              <a:solidFill>
-                <a:srgbClr val="000000"/>
-              </a:solidFill>
-              <a:latin typeface="Calibri"/>
+            <a:endParaRPr b="0" lang="en-US" sz="3200" spc="-1" strike="noStrike">
+              <a:latin typeface="Arial"/>
             </a:endParaRPr>
           </a:p>
         </p:txBody>
@@ -1594,20 +1507,8 @@
             <a:normAutofit/>
           </a:bodyPr>
           <a:p>
-            <a:pPr>
-              <a:lnSpc>
-                <a:spcPct val="90000"/>
-              </a:lnSpc>
-              <a:spcBef>
-                <a:spcPts val="1417"/>
-              </a:spcBef>
-              <a:buNone/>
-            </a:pPr>
-            <a:endParaRPr b="0" lang="en-US" sz="2100" spc="-1" strike="noStrike">
-              <a:solidFill>
-                <a:srgbClr val="000000"/>
-              </a:solidFill>
-              <a:latin typeface="Calibri"/>
+            <a:endParaRPr b="0" lang="en-US" sz="3200" spc="-1" strike="noStrike">
+              <a:latin typeface="Arial"/>
             </a:endParaRPr>
           </a:p>
         </p:txBody>
@@ -1640,20 +1541,8 @@
             <a:normAutofit/>
           </a:bodyPr>
           <a:p>
-            <a:pPr>
-              <a:lnSpc>
-                <a:spcPct val="90000"/>
-              </a:lnSpc>
-              <a:spcBef>
-                <a:spcPts val="1417"/>
-              </a:spcBef>
-              <a:buNone/>
-            </a:pPr>
-            <a:endParaRPr b="0" lang="en-US" sz="2100" spc="-1" strike="noStrike">
-              <a:solidFill>
-                <a:srgbClr val="000000"/>
-              </a:solidFill>
-              <a:latin typeface="Calibri"/>
+            <a:endParaRPr b="0" lang="en-US" sz="3200" spc="-1" strike="noStrike">
+              <a:latin typeface="Arial"/>
             </a:endParaRPr>
           </a:p>
         </p:txBody>
@@ -1686,20 +1575,8 @@
             <a:normAutofit/>
           </a:bodyPr>
           <a:p>
-            <a:pPr>
-              <a:lnSpc>
-                <a:spcPct val="90000"/>
-              </a:lnSpc>
-              <a:spcBef>
-                <a:spcPts val="1417"/>
-              </a:spcBef>
-              <a:buNone/>
-            </a:pPr>
-            <a:endParaRPr b="0" lang="en-US" sz="2100" spc="-1" strike="noStrike">
-              <a:solidFill>
-                <a:srgbClr val="000000"/>
-              </a:solidFill>
-              <a:latin typeface="Calibri"/>
+            <a:endParaRPr b="0" lang="en-US" sz="3200" spc="-1" strike="noStrike">
+              <a:latin typeface="Arial"/>
             </a:endParaRPr>
           </a:p>
         </p:txBody>
@@ -1732,20 +1609,8 @@
             <a:normAutofit/>
           </a:bodyPr>
           <a:p>
-            <a:pPr>
-              <a:lnSpc>
-                <a:spcPct val="90000"/>
-              </a:lnSpc>
-              <a:spcBef>
-                <a:spcPts val="1417"/>
-              </a:spcBef>
-              <a:buNone/>
-            </a:pPr>
-            <a:endParaRPr b="0" lang="en-US" sz="2100" spc="-1" strike="noStrike">
-              <a:solidFill>
-                <a:srgbClr val="000000"/>
-              </a:solidFill>
-              <a:latin typeface="Calibri"/>
+            <a:endParaRPr b="0" lang="en-US" sz="3200" spc="-1" strike="noStrike">
+              <a:latin typeface="Arial"/>
             </a:endParaRPr>
           </a:p>
         </p:txBody>
@@ -1778,20 +1643,8 @@
             <a:normAutofit/>
           </a:bodyPr>
           <a:p>
-            <a:pPr>
-              <a:lnSpc>
-                <a:spcPct val="90000"/>
-              </a:lnSpc>
-              <a:spcBef>
-                <a:spcPts val="1417"/>
-              </a:spcBef>
-              <a:buNone/>
-            </a:pPr>
-            <a:endParaRPr b="0" lang="en-US" sz="2100" spc="-1" strike="noStrike">
-              <a:solidFill>
-                <a:srgbClr val="000000"/>
-              </a:solidFill>
-              <a:latin typeface="Calibri"/>
+            <a:endParaRPr b="0" lang="en-US" sz="3200" spc="-1" strike="noStrike">
+              <a:latin typeface="Arial"/>
             </a:endParaRPr>
           </a:p>
         </p:txBody>
@@ -1803,7 +1656,7 @@
             <a:spLocks noGrp="1"/>
           </p:cNvSpPr>
           <p:nvPr>
-            <p:ph type="ftr" idx="2"/>
+            <p:ph type="ftr" idx="1"/>
           </p:nvPr>
         </p:nvSpPr>
         <p:spPr/>
@@ -1823,14 +1676,14 @@
             <a:spLocks noGrp="1"/>
           </p:cNvSpPr>
           <p:nvPr>
-            <p:ph type="sldNum" idx="3"/>
+            <p:ph type="sldNum" idx="2"/>
           </p:nvPr>
         </p:nvSpPr>
         <p:spPr/>
         <p:txBody>
           <a:bodyPr/>
           <a:p>
-            <a:fld id="{97FC52C9-3EFE-42F2-9119-A373555AD64A}" type="slidenum">
+            <a:fld id="{D6E99B95-4100-4D96-A7BC-4A986CEDA105}" type="slidenum">
               <a:t>&lt;#&gt;</a:t>
             </a:fld>
           </a:p>
@@ -1843,7 +1696,7 @@
             <a:spLocks noGrp="1"/>
           </p:cNvSpPr>
           <p:nvPr>
-            <p:ph type="dt" idx="1"/>
+            <p:ph type="dt" idx="3"/>
           </p:nvPr>
         </p:nvSpPr>
         <p:spPr/>
@@ -1851,7 +1704,7 @@
           <a:bodyPr/>
           <a:p>
             <a:r>
-              <a:rPr lang="ru-RU"/>
+              <a:rPr lang="en-US"/>
               <a:t/>
             </a:r>
           </a:p>
@@ -1892,7 +1745,7 @@
         <p:spPr>
           <a:xfrm>
             <a:off x="1143000" y="841680"/>
-            <a:ext cx="6857640" cy="1790280"/>
+            <a:ext cx="6857280" cy="1789920"/>
           </a:xfrm>
           <a:prstGeom prst="rect">
             <a:avLst/>
@@ -1907,11 +1760,11 @@
             <a:noAutofit/>
           </a:bodyPr>
           <a:p>
-            <a:endParaRPr b="0" lang="en-US" sz="1800" spc="-1" strike="noStrike">
-              <a:solidFill>
-                <a:srgbClr val="000000"/>
-              </a:solidFill>
-              <a:latin typeface="Calibri"/>
+            <a:pPr algn="ctr">
+              <a:buNone/>
+            </a:pPr>
+            <a:endParaRPr b="0" lang="en-US" sz="4400" spc="-1" strike="noStrike">
+              <a:latin typeface="Arial"/>
             </a:endParaRPr>
           </a:p>
         </p:txBody>
@@ -1947,7 +1800,7 @@
             <a:pPr algn="ctr">
               <a:buNone/>
             </a:pPr>
-            <a:endParaRPr b="0" lang="ru-RU" sz="3200" spc="-1" strike="noStrike">
+            <a:endParaRPr b="0" lang="en-US" sz="3200" spc="-1" strike="noStrike">
               <a:latin typeface="Arial"/>
             </a:endParaRPr>
           </a:p>
@@ -1960,7 +1813,7 @@
             <a:spLocks noGrp="1"/>
           </p:cNvSpPr>
           <p:nvPr>
-            <p:ph type="ftr" idx="2"/>
+            <p:ph type="ftr" idx="1"/>
           </p:nvPr>
         </p:nvSpPr>
         <p:spPr/>
@@ -1980,14 +1833,14 @@
             <a:spLocks noGrp="1"/>
           </p:cNvSpPr>
           <p:nvPr>
-            <p:ph type="sldNum" idx="3"/>
+            <p:ph type="sldNum" idx="2"/>
           </p:nvPr>
         </p:nvSpPr>
         <p:spPr/>
         <p:txBody>
           <a:bodyPr/>
           <a:p>
-            <a:fld id="{A098A89B-7A9B-4975-90F6-C58AEB609AC4}" type="slidenum">
+            <a:fld id="{370A1277-F38E-4B6C-B82E-F66F45B8500A}" type="slidenum">
               <a:t>&lt;#&gt;</a:t>
             </a:fld>
           </a:p>
@@ -2000,7 +1853,7 @@
             <a:spLocks noGrp="1"/>
           </p:cNvSpPr>
           <p:nvPr>
-            <p:ph type="dt" idx="1"/>
+            <p:ph type="dt" idx="3"/>
           </p:nvPr>
         </p:nvSpPr>
         <p:spPr/>
@@ -2008,7 +1861,7 @@
           <a:bodyPr/>
           <a:p>
             <a:r>
-              <a:rPr lang="ru-RU"/>
+              <a:rPr lang="en-US"/>
               <a:t/>
             </a:r>
           </a:p>
@@ -2049,7 +1902,7 @@
         <p:spPr>
           <a:xfrm>
             <a:off x="1143000" y="841680"/>
-            <a:ext cx="6857640" cy="1790280"/>
+            <a:ext cx="6857280" cy="1789920"/>
           </a:xfrm>
           <a:prstGeom prst="rect">
             <a:avLst/>
@@ -2064,11 +1917,11 @@
             <a:noAutofit/>
           </a:bodyPr>
           <a:p>
-            <a:endParaRPr b="0" lang="en-US" sz="1800" spc="-1" strike="noStrike">
-              <a:solidFill>
-                <a:srgbClr val="000000"/>
-              </a:solidFill>
-              <a:latin typeface="Calibri"/>
+            <a:pPr algn="ctr">
+              <a:buNone/>
+            </a:pPr>
+            <a:endParaRPr b="0" lang="en-US" sz="4400" spc="-1" strike="noStrike">
+              <a:latin typeface="Arial"/>
             </a:endParaRPr>
           </a:p>
         </p:txBody>
@@ -2101,20 +1954,8 @@
             <a:normAutofit/>
           </a:bodyPr>
           <a:p>
-            <a:pPr>
-              <a:lnSpc>
-                <a:spcPct val="90000"/>
-              </a:lnSpc>
-              <a:spcBef>
-                <a:spcPts val="1417"/>
-              </a:spcBef>
-              <a:buNone/>
-            </a:pPr>
-            <a:endParaRPr b="0" lang="en-US" sz="2100" spc="-1" strike="noStrike">
-              <a:solidFill>
-                <a:srgbClr val="000000"/>
-              </a:solidFill>
-              <a:latin typeface="Calibri"/>
+            <a:endParaRPr b="0" lang="en-US" sz="3200" spc="-1" strike="noStrike">
+              <a:latin typeface="Arial"/>
             </a:endParaRPr>
           </a:p>
         </p:txBody>
@@ -2126,7 +1967,7 @@
             <a:spLocks noGrp="1"/>
           </p:cNvSpPr>
           <p:nvPr>
-            <p:ph type="ftr" idx="2"/>
+            <p:ph type="ftr" idx="1"/>
           </p:nvPr>
         </p:nvSpPr>
         <p:spPr/>
@@ -2146,14 +1987,14 @@
             <a:spLocks noGrp="1"/>
           </p:cNvSpPr>
           <p:nvPr>
-            <p:ph type="sldNum" idx="3"/>
+            <p:ph type="sldNum" idx="2"/>
           </p:nvPr>
         </p:nvSpPr>
         <p:spPr/>
         <p:txBody>
           <a:bodyPr/>
           <a:p>
-            <a:fld id="{4D9A6C7C-1A9E-4F2A-838A-261EE3325409}" type="slidenum">
+            <a:fld id="{D3CF51F6-041C-4949-ABFC-F9C14BA3B1AC}" type="slidenum">
               <a:t>&lt;#&gt;</a:t>
             </a:fld>
           </a:p>
@@ -2166,7 +2007,7 @@
             <a:spLocks noGrp="1"/>
           </p:cNvSpPr>
           <p:nvPr>
-            <p:ph type="dt" idx="1"/>
+            <p:ph type="dt" idx="3"/>
           </p:nvPr>
         </p:nvSpPr>
         <p:spPr/>
@@ -2174,7 +2015,7 @@
           <a:bodyPr/>
           <a:p>
             <a:r>
-              <a:rPr lang="ru-RU"/>
+              <a:rPr lang="en-US"/>
               <a:t/>
             </a:r>
           </a:p>
@@ -2215,7 +2056,7 @@
         <p:spPr>
           <a:xfrm>
             <a:off x="1143000" y="841680"/>
-            <a:ext cx="6857640" cy="1790280"/>
+            <a:ext cx="6857280" cy="1789920"/>
           </a:xfrm>
           <a:prstGeom prst="rect">
             <a:avLst/>
@@ -2230,11 +2071,11 @@
             <a:noAutofit/>
           </a:bodyPr>
           <a:p>
-            <a:endParaRPr b="0" lang="en-US" sz="1800" spc="-1" strike="noStrike">
-              <a:solidFill>
-                <a:srgbClr val="000000"/>
-              </a:solidFill>
-              <a:latin typeface="Calibri"/>
+            <a:pPr algn="ctr">
+              <a:buNone/>
+            </a:pPr>
+            <a:endParaRPr b="0" lang="en-US" sz="4400" spc="-1" strike="noStrike">
+              <a:latin typeface="Arial"/>
             </a:endParaRPr>
           </a:p>
         </p:txBody>
@@ -2267,20 +2108,8 @@
             <a:normAutofit/>
           </a:bodyPr>
           <a:p>
-            <a:pPr>
-              <a:lnSpc>
-                <a:spcPct val="90000"/>
-              </a:lnSpc>
-              <a:spcBef>
-                <a:spcPts val="1417"/>
-              </a:spcBef>
-              <a:buNone/>
-            </a:pPr>
-            <a:endParaRPr b="0" lang="en-US" sz="2100" spc="-1" strike="noStrike">
-              <a:solidFill>
-                <a:srgbClr val="000000"/>
-              </a:solidFill>
-              <a:latin typeface="Calibri"/>
+            <a:endParaRPr b="0" lang="en-US" sz="3200" spc="-1" strike="noStrike">
+              <a:latin typeface="Arial"/>
             </a:endParaRPr>
           </a:p>
         </p:txBody>
@@ -2313,20 +2142,8 @@
             <a:normAutofit/>
           </a:bodyPr>
           <a:p>
-            <a:pPr>
-              <a:lnSpc>
-                <a:spcPct val="90000"/>
-              </a:lnSpc>
-              <a:spcBef>
-                <a:spcPts val="1417"/>
-              </a:spcBef>
-              <a:buNone/>
-            </a:pPr>
-            <a:endParaRPr b="0" lang="en-US" sz="2100" spc="-1" strike="noStrike">
-              <a:solidFill>
-                <a:srgbClr val="000000"/>
-              </a:solidFill>
-              <a:latin typeface="Calibri"/>
+            <a:endParaRPr b="0" lang="en-US" sz="3200" spc="-1" strike="noStrike">
+              <a:latin typeface="Arial"/>
             </a:endParaRPr>
           </a:p>
         </p:txBody>
@@ -2338,7 +2155,7 @@
             <a:spLocks noGrp="1"/>
           </p:cNvSpPr>
           <p:nvPr>
-            <p:ph type="ftr" idx="2"/>
+            <p:ph type="ftr" idx="1"/>
           </p:nvPr>
         </p:nvSpPr>
         <p:spPr/>
@@ -2358,14 +2175,14 @@
             <a:spLocks noGrp="1"/>
           </p:cNvSpPr>
           <p:nvPr>
-            <p:ph type="sldNum" idx="3"/>
+            <p:ph type="sldNum" idx="2"/>
           </p:nvPr>
         </p:nvSpPr>
         <p:spPr/>
         <p:txBody>
           <a:bodyPr/>
           <a:p>
-            <a:fld id="{07F35275-C57F-49FC-AC37-9799AAE01FF3}" type="slidenum">
+            <a:fld id="{DB1DF8E3-CC57-4C61-ACB8-296A551C75AF}" type="slidenum">
               <a:t>&lt;#&gt;</a:t>
             </a:fld>
           </a:p>
@@ -2378,7 +2195,7 @@
             <a:spLocks noGrp="1"/>
           </p:cNvSpPr>
           <p:nvPr>
-            <p:ph type="dt" idx="1"/>
+            <p:ph type="dt" idx="3"/>
           </p:nvPr>
         </p:nvSpPr>
         <p:spPr/>
@@ -2386,7 +2203,7 @@
           <a:bodyPr/>
           <a:p>
             <a:r>
-              <a:rPr lang="ru-RU"/>
+              <a:rPr lang="en-US"/>
               <a:t/>
             </a:r>
           </a:p>
@@ -2427,7 +2244,7 @@
         <p:spPr>
           <a:xfrm>
             <a:off x="1143000" y="841680"/>
-            <a:ext cx="6857640" cy="1790280"/>
+            <a:ext cx="6857280" cy="1789920"/>
           </a:xfrm>
           <a:prstGeom prst="rect">
             <a:avLst/>
@@ -2442,11 +2259,11 @@
             <a:noAutofit/>
           </a:bodyPr>
           <a:p>
-            <a:endParaRPr b="0" lang="en-US" sz="1800" spc="-1" strike="noStrike">
-              <a:solidFill>
-                <a:srgbClr val="000000"/>
-              </a:solidFill>
-              <a:latin typeface="Calibri"/>
+            <a:pPr algn="ctr">
+              <a:buNone/>
+            </a:pPr>
+            <a:endParaRPr b="0" lang="en-US" sz="4400" spc="-1" strike="noStrike">
+              <a:latin typeface="Arial"/>
             </a:endParaRPr>
           </a:p>
         </p:txBody>
@@ -2458,7 +2275,7 @@
             <a:spLocks noGrp="1"/>
           </p:cNvSpPr>
           <p:nvPr>
-            <p:ph type="ftr" idx="2"/>
+            <p:ph type="ftr" idx="1"/>
           </p:nvPr>
         </p:nvSpPr>
         <p:spPr/>
@@ -2478,14 +2295,14 @@
             <a:spLocks noGrp="1"/>
           </p:cNvSpPr>
           <p:nvPr>
-            <p:ph type="sldNum" idx="3"/>
+            <p:ph type="sldNum" idx="2"/>
           </p:nvPr>
         </p:nvSpPr>
         <p:spPr/>
         <p:txBody>
           <a:bodyPr/>
           <a:p>
-            <a:fld id="{03326D3C-4697-49AE-86C5-5ED3058D232D}" type="slidenum">
+            <a:fld id="{1D364175-8D4A-42D3-848D-AD1E9180C8B9}" type="slidenum">
               <a:t>&lt;#&gt;</a:t>
             </a:fld>
           </a:p>
@@ -2498,7 +2315,7 @@
             <a:spLocks noGrp="1"/>
           </p:cNvSpPr>
           <p:nvPr>
-            <p:ph type="dt" idx="1"/>
+            <p:ph type="dt" idx="3"/>
           </p:nvPr>
         </p:nvSpPr>
         <p:spPr/>
@@ -2506,7 +2323,7 @@
           <a:bodyPr/>
           <a:p>
             <a:r>
-              <a:rPr lang="ru-RU"/>
+              <a:rPr lang="en-US"/>
               <a:t/>
             </a:r>
           </a:p>
@@ -2547,7 +2364,7 @@
         <p:spPr>
           <a:xfrm>
             <a:off x="1143000" y="841680"/>
-            <a:ext cx="6857640" cy="8299800"/>
+            <a:ext cx="6857280" cy="8298360"/>
           </a:xfrm>
           <a:prstGeom prst="rect">
             <a:avLst/>
@@ -2565,7 +2382,7 @@
             <a:pPr algn="ctr">
               <a:buNone/>
             </a:pPr>
-            <a:endParaRPr b="0" lang="ru-RU" sz="3200" spc="-1" strike="noStrike">
+            <a:endParaRPr b="0" lang="en-US" sz="3200" spc="-1" strike="noStrike">
               <a:latin typeface="Arial"/>
             </a:endParaRPr>
           </a:p>
@@ -2578,7 +2395,7 @@
             <a:spLocks noGrp="1"/>
           </p:cNvSpPr>
           <p:nvPr>
-            <p:ph type="ftr" idx="2"/>
+            <p:ph type="ftr" idx="1"/>
           </p:nvPr>
         </p:nvSpPr>
         <p:spPr/>
@@ -2598,14 +2415,14 @@
             <a:spLocks noGrp="1"/>
           </p:cNvSpPr>
           <p:nvPr>
-            <p:ph type="sldNum" idx="3"/>
+            <p:ph type="sldNum" idx="2"/>
           </p:nvPr>
         </p:nvSpPr>
         <p:spPr/>
         <p:txBody>
           <a:bodyPr/>
           <a:p>
-            <a:fld id="{BB7422A1-AB87-4C35-B9BC-3FF235DDB40B}" type="slidenum">
+            <a:fld id="{E4C7D925-2ECB-4678-AA2F-A4B53946CD10}" type="slidenum">
               <a:t>&lt;#&gt;</a:t>
             </a:fld>
           </a:p>
@@ -2618,7 +2435,7 @@
             <a:spLocks noGrp="1"/>
           </p:cNvSpPr>
           <p:nvPr>
-            <p:ph type="dt" idx="1"/>
+            <p:ph type="dt" idx="3"/>
           </p:nvPr>
         </p:nvSpPr>
         <p:spPr/>
@@ -2626,7 +2443,7 @@
           <a:bodyPr/>
           <a:p>
             <a:r>
-              <a:rPr lang="ru-RU"/>
+              <a:rPr lang="en-US"/>
               <a:t/>
             </a:r>
           </a:p>
@@ -2667,7 +2484,7 @@
         <p:spPr>
           <a:xfrm>
             <a:off x="1143000" y="841680"/>
-            <a:ext cx="6857640" cy="1790280"/>
+            <a:ext cx="6857280" cy="1789920"/>
           </a:xfrm>
           <a:prstGeom prst="rect">
             <a:avLst/>
@@ -2682,11 +2499,11 @@
             <a:noAutofit/>
           </a:bodyPr>
           <a:p>
-            <a:endParaRPr b="0" lang="en-US" sz="1800" spc="-1" strike="noStrike">
-              <a:solidFill>
-                <a:srgbClr val="000000"/>
-              </a:solidFill>
-              <a:latin typeface="Calibri"/>
+            <a:pPr algn="ctr">
+              <a:buNone/>
+            </a:pPr>
+            <a:endParaRPr b="0" lang="en-US" sz="4400" spc="-1" strike="noStrike">
+              <a:latin typeface="Arial"/>
             </a:endParaRPr>
           </a:p>
         </p:txBody>
@@ -2719,20 +2536,8 @@
             <a:normAutofit/>
           </a:bodyPr>
           <a:p>
-            <a:pPr>
-              <a:lnSpc>
-                <a:spcPct val="90000"/>
-              </a:lnSpc>
-              <a:spcBef>
-                <a:spcPts val="1417"/>
-              </a:spcBef>
-              <a:buNone/>
-            </a:pPr>
-            <a:endParaRPr b="0" lang="en-US" sz="2100" spc="-1" strike="noStrike">
-              <a:solidFill>
-                <a:srgbClr val="000000"/>
-              </a:solidFill>
-              <a:latin typeface="Calibri"/>
+            <a:endParaRPr b="0" lang="en-US" sz="3200" spc="-1" strike="noStrike">
+              <a:latin typeface="Arial"/>
             </a:endParaRPr>
           </a:p>
         </p:txBody>
@@ -2765,20 +2570,8 @@
             <a:normAutofit/>
           </a:bodyPr>
           <a:p>
-            <a:pPr>
-              <a:lnSpc>
-                <a:spcPct val="90000"/>
-              </a:lnSpc>
-              <a:spcBef>
-                <a:spcPts val="1417"/>
-              </a:spcBef>
-              <a:buNone/>
-            </a:pPr>
-            <a:endParaRPr b="0" lang="en-US" sz="2100" spc="-1" strike="noStrike">
-              <a:solidFill>
-                <a:srgbClr val="000000"/>
-              </a:solidFill>
-              <a:latin typeface="Calibri"/>
+            <a:endParaRPr b="0" lang="en-US" sz="3200" spc="-1" strike="noStrike">
+              <a:latin typeface="Arial"/>
             </a:endParaRPr>
           </a:p>
         </p:txBody>
@@ -2811,20 +2604,8 @@
             <a:normAutofit/>
           </a:bodyPr>
           <a:p>
-            <a:pPr>
-              <a:lnSpc>
-                <a:spcPct val="90000"/>
-              </a:lnSpc>
-              <a:spcBef>
-                <a:spcPts val="1417"/>
-              </a:spcBef>
-              <a:buNone/>
-            </a:pPr>
-            <a:endParaRPr b="0" lang="en-US" sz="2100" spc="-1" strike="noStrike">
-              <a:solidFill>
-                <a:srgbClr val="000000"/>
-              </a:solidFill>
-              <a:latin typeface="Calibri"/>
+            <a:endParaRPr b="0" lang="en-US" sz="3200" spc="-1" strike="noStrike">
+              <a:latin typeface="Arial"/>
             </a:endParaRPr>
           </a:p>
         </p:txBody>
@@ -2836,7 +2617,7 @@
             <a:spLocks noGrp="1"/>
           </p:cNvSpPr>
           <p:nvPr>
-            <p:ph type="ftr" idx="2"/>
+            <p:ph type="ftr" idx="1"/>
           </p:nvPr>
         </p:nvSpPr>
         <p:spPr/>
@@ -2856,14 +2637,14 @@
             <a:spLocks noGrp="1"/>
           </p:cNvSpPr>
           <p:nvPr>
-            <p:ph type="sldNum" idx="3"/>
+            <p:ph type="sldNum" idx="2"/>
           </p:nvPr>
         </p:nvSpPr>
         <p:spPr/>
         <p:txBody>
           <a:bodyPr/>
           <a:p>
-            <a:fld id="{F58B55F7-7C6F-46F2-AE58-77C0CEA99950}" type="slidenum">
+            <a:fld id="{BED516CD-7E9E-4B17-8763-FA6A3D1920AA}" type="slidenum">
               <a:t>&lt;#&gt;</a:t>
             </a:fld>
           </a:p>
@@ -2876,7 +2657,7 @@
             <a:spLocks noGrp="1"/>
           </p:cNvSpPr>
           <p:nvPr>
-            <p:ph type="dt" idx="1"/>
+            <p:ph type="dt" idx="3"/>
           </p:nvPr>
         </p:nvSpPr>
         <p:spPr/>
@@ -2884,7 +2665,7 @@
           <a:bodyPr/>
           <a:p>
             <a:r>
-              <a:rPr lang="ru-RU"/>
+              <a:rPr lang="en-US"/>
               <a:t/>
             </a:r>
           </a:p>
@@ -2925,7 +2706,7 @@
         <p:spPr>
           <a:xfrm>
             <a:off x="1143000" y="841680"/>
-            <a:ext cx="6857640" cy="1790280"/>
+            <a:ext cx="6857280" cy="1789920"/>
           </a:xfrm>
           <a:prstGeom prst="rect">
             <a:avLst/>
@@ -2940,11 +2721,11 @@
             <a:noAutofit/>
           </a:bodyPr>
           <a:p>
-            <a:endParaRPr b="0" lang="en-US" sz="1800" spc="-1" strike="noStrike">
-              <a:solidFill>
-                <a:srgbClr val="000000"/>
-              </a:solidFill>
-              <a:latin typeface="Calibri"/>
+            <a:pPr algn="ctr">
+              <a:buNone/>
+            </a:pPr>
+            <a:endParaRPr b="0" lang="en-US" sz="4400" spc="-1" strike="noStrike">
+              <a:latin typeface="Arial"/>
             </a:endParaRPr>
           </a:p>
         </p:txBody>
@@ -2977,20 +2758,8 @@
             <a:normAutofit/>
           </a:bodyPr>
           <a:p>
-            <a:pPr>
-              <a:lnSpc>
-                <a:spcPct val="90000"/>
-              </a:lnSpc>
-              <a:spcBef>
-                <a:spcPts val="1417"/>
-              </a:spcBef>
-              <a:buNone/>
-            </a:pPr>
-            <a:endParaRPr b="0" lang="en-US" sz="2100" spc="-1" strike="noStrike">
-              <a:solidFill>
-                <a:srgbClr val="000000"/>
-              </a:solidFill>
-              <a:latin typeface="Calibri"/>
+            <a:endParaRPr b="0" lang="en-US" sz="3200" spc="-1" strike="noStrike">
+              <a:latin typeface="Arial"/>
             </a:endParaRPr>
           </a:p>
         </p:txBody>
@@ -3023,20 +2792,8 @@
             <a:normAutofit/>
           </a:bodyPr>
           <a:p>
-            <a:pPr>
-              <a:lnSpc>
-                <a:spcPct val="90000"/>
-              </a:lnSpc>
-              <a:spcBef>
-                <a:spcPts val="1417"/>
-              </a:spcBef>
-              <a:buNone/>
-            </a:pPr>
-            <a:endParaRPr b="0" lang="en-US" sz="2100" spc="-1" strike="noStrike">
-              <a:solidFill>
-                <a:srgbClr val="000000"/>
-              </a:solidFill>
-              <a:latin typeface="Calibri"/>
+            <a:endParaRPr b="0" lang="en-US" sz="3200" spc="-1" strike="noStrike">
+              <a:latin typeface="Arial"/>
             </a:endParaRPr>
           </a:p>
         </p:txBody>
@@ -3069,20 +2826,8 @@
             <a:normAutofit/>
           </a:bodyPr>
           <a:p>
-            <a:pPr>
-              <a:lnSpc>
-                <a:spcPct val="90000"/>
-              </a:lnSpc>
-              <a:spcBef>
-                <a:spcPts val="1417"/>
-              </a:spcBef>
-              <a:buNone/>
-            </a:pPr>
-            <a:endParaRPr b="0" lang="en-US" sz="2100" spc="-1" strike="noStrike">
-              <a:solidFill>
-                <a:srgbClr val="000000"/>
-              </a:solidFill>
-              <a:latin typeface="Calibri"/>
+            <a:endParaRPr b="0" lang="en-US" sz="3200" spc="-1" strike="noStrike">
+              <a:latin typeface="Arial"/>
             </a:endParaRPr>
           </a:p>
         </p:txBody>
@@ -3094,7 +2839,7 @@
             <a:spLocks noGrp="1"/>
           </p:cNvSpPr>
           <p:nvPr>
-            <p:ph type="ftr" idx="2"/>
+            <p:ph type="ftr" idx="1"/>
           </p:nvPr>
         </p:nvSpPr>
         <p:spPr/>
@@ -3114,14 +2859,14 @@
             <a:spLocks noGrp="1"/>
           </p:cNvSpPr>
           <p:nvPr>
-            <p:ph type="sldNum" idx="3"/>
+            <p:ph type="sldNum" idx="2"/>
           </p:nvPr>
         </p:nvSpPr>
         <p:spPr/>
         <p:txBody>
           <a:bodyPr/>
           <a:p>
-            <a:fld id="{A3AC14F4-1387-47F2-9673-B88ACD611F32}" type="slidenum">
+            <a:fld id="{7D879FA3-7F02-4A6F-A234-CA834C9DC26B}" type="slidenum">
               <a:t>&lt;#&gt;</a:t>
             </a:fld>
           </a:p>
@@ -3134,7 +2879,7 @@
             <a:spLocks noGrp="1"/>
           </p:cNvSpPr>
           <p:nvPr>
-            <p:ph type="dt" idx="1"/>
+            <p:ph type="dt" idx="3"/>
           </p:nvPr>
         </p:nvSpPr>
         <p:spPr/>
@@ -3142,7 +2887,7 @@
           <a:bodyPr/>
           <a:p>
             <a:r>
-              <a:rPr lang="ru-RU"/>
+              <a:rPr lang="en-US"/>
               <a:t/>
             </a:r>
           </a:p>
@@ -3183,7 +2928,7 @@
         <p:spPr>
           <a:xfrm>
             <a:off x="1143000" y="841680"/>
-            <a:ext cx="6857640" cy="1790280"/>
+            <a:ext cx="6857280" cy="1789920"/>
           </a:xfrm>
           <a:prstGeom prst="rect">
             <a:avLst/>
@@ -3198,11 +2943,11 @@
             <a:noAutofit/>
           </a:bodyPr>
           <a:p>
-            <a:endParaRPr b="0" lang="en-US" sz="1800" spc="-1" strike="noStrike">
-              <a:solidFill>
-                <a:srgbClr val="000000"/>
-              </a:solidFill>
-              <a:latin typeface="Calibri"/>
+            <a:pPr algn="ctr">
+              <a:buNone/>
+            </a:pPr>
+            <a:endParaRPr b="0" lang="en-US" sz="4400" spc="-1" strike="noStrike">
+              <a:latin typeface="Arial"/>
             </a:endParaRPr>
           </a:p>
         </p:txBody>
@@ -3235,20 +2980,8 @@
             <a:normAutofit/>
           </a:bodyPr>
           <a:p>
-            <a:pPr>
-              <a:lnSpc>
-                <a:spcPct val="90000"/>
-              </a:lnSpc>
-              <a:spcBef>
-                <a:spcPts val="1417"/>
-              </a:spcBef>
-              <a:buNone/>
-            </a:pPr>
-            <a:endParaRPr b="0" lang="en-US" sz="2100" spc="-1" strike="noStrike">
-              <a:solidFill>
-                <a:srgbClr val="000000"/>
-              </a:solidFill>
-              <a:latin typeface="Calibri"/>
+            <a:endParaRPr b="0" lang="en-US" sz="3200" spc="-1" strike="noStrike">
+              <a:latin typeface="Arial"/>
             </a:endParaRPr>
           </a:p>
         </p:txBody>
@@ -3281,20 +3014,8 @@
             <a:normAutofit/>
           </a:bodyPr>
           <a:p>
-            <a:pPr>
-              <a:lnSpc>
-                <a:spcPct val="90000"/>
-              </a:lnSpc>
-              <a:spcBef>
-                <a:spcPts val="1417"/>
-              </a:spcBef>
-              <a:buNone/>
-            </a:pPr>
-            <a:endParaRPr b="0" lang="en-US" sz="2100" spc="-1" strike="noStrike">
-              <a:solidFill>
-                <a:srgbClr val="000000"/>
-              </a:solidFill>
-              <a:latin typeface="Calibri"/>
+            <a:endParaRPr b="0" lang="en-US" sz="3200" spc="-1" strike="noStrike">
+              <a:latin typeface="Arial"/>
             </a:endParaRPr>
           </a:p>
         </p:txBody>
@@ -3327,20 +3048,8 @@
             <a:normAutofit/>
           </a:bodyPr>
           <a:p>
-            <a:pPr>
-              <a:lnSpc>
-                <a:spcPct val="90000"/>
-              </a:lnSpc>
-              <a:spcBef>
-                <a:spcPts val="1417"/>
-              </a:spcBef>
-              <a:buNone/>
-            </a:pPr>
-            <a:endParaRPr b="0" lang="en-US" sz="2100" spc="-1" strike="noStrike">
-              <a:solidFill>
-                <a:srgbClr val="000000"/>
-              </a:solidFill>
-              <a:latin typeface="Calibri"/>
+            <a:endParaRPr b="0" lang="en-US" sz="3200" spc="-1" strike="noStrike">
+              <a:latin typeface="Arial"/>
             </a:endParaRPr>
           </a:p>
         </p:txBody>
@@ -3352,7 +3061,7 @@
             <a:spLocks noGrp="1"/>
           </p:cNvSpPr>
           <p:nvPr>
-            <p:ph type="ftr" idx="2"/>
+            <p:ph type="ftr" idx="1"/>
           </p:nvPr>
         </p:nvSpPr>
         <p:spPr/>
@@ -3372,14 +3081,14 @@
             <a:spLocks noGrp="1"/>
           </p:cNvSpPr>
           <p:nvPr>
-            <p:ph type="sldNum" idx="3"/>
+            <p:ph type="sldNum" idx="2"/>
           </p:nvPr>
         </p:nvSpPr>
         <p:spPr/>
         <p:txBody>
           <a:bodyPr/>
           <a:p>
-            <a:fld id="{0C5BE515-76DF-4FE6-B271-02FCDFF43F7D}" type="slidenum">
+            <a:fld id="{3CFD43BE-0417-40ED-B12F-9AB29324FE89}" type="slidenum">
               <a:t>&lt;#&gt;</a:t>
             </a:fld>
           </a:p>
@@ -3392,7 +3101,7 @@
             <a:spLocks noGrp="1"/>
           </p:cNvSpPr>
           <p:nvPr>
-            <p:ph type="dt" idx="1"/>
+            <p:ph type="dt" idx="3"/>
           </p:nvPr>
         </p:nvSpPr>
         <p:spPr/>
@@ -3400,7 +3109,7 @@
           <a:bodyPr/>
           <a:p>
             <a:r>
-              <a:rPr lang="ru-RU"/>
+              <a:rPr lang="en-US"/>
               <a:t/>
             </a:r>
           </a:p>
@@ -3448,41 +3157,29 @@
         <p:spPr>
           <a:xfrm>
             <a:off x="1143000" y="841680"/>
-            <a:ext cx="6857640" cy="1790280"/>
-          </a:xfrm>
-          <a:prstGeom prst="rect">
-            <a:avLst/>
-          </a:prstGeom>
-          <a:noFill/>
-          <a:ln w="0">
-            <a:noFill/>
-          </a:ln>
-        </p:spPr>
-        <p:txBody>
-          <a:bodyPr anchor="b">
-            <a:noAutofit/>
-          </a:bodyPr>
-          <a:p>
-            <a:pPr algn="ctr">
-              <a:lnSpc>
-                <a:spcPct val="90000"/>
-              </a:lnSpc>
-              <a:buNone/>
-            </a:pPr>
-            <a:r>
-              <a:rPr b="0" lang="ru-RU" sz="4500" spc="-1" strike="noStrike">
-                <a:solidFill>
-                  <a:srgbClr val="000000"/>
-                </a:solidFill>
-                <a:latin typeface="Calibri Light"/>
-              </a:rPr>
-              <a:t>Образец заголовка</a:t>
-            </a:r>
-            <a:endParaRPr b="0" lang="en-US" sz="4500" spc="-1" strike="noStrike">
-              <a:solidFill>
-                <a:srgbClr val="000000"/>
-              </a:solidFill>
-              <a:latin typeface="Calibri"/>
+            <a:ext cx="6857280" cy="1789920"/>
+          </a:xfrm>
+          <a:prstGeom prst="rect">
+            <a:avLst/>
+          </a:prstGeom>
+          <a:noFill/>
+          <a:ln w="0">
+            <a:noFill/>
+          </a:ln>
+        </p:spPr>
+        <p:txBody>
+          <a:bodyPr lIns="0" rIns="0" tIns="0" bIns="0" anchor="ctr">
+            <a:noAutofit/>
+          </a:bodyPr>
+          <a:p>
+            <a:r>
+              <a:rPr b="0" lang="en-US" sz="1800" spc="-1" strike="noStrike">
+                <a:latin typeface="Arial"/>
+              </a:rPr>
+              <a:t>Click to edit the title text format</a:t>
+            </a:r>
+            <a:endParaRPr b="0" lang="en-US" sz="1800" spc="-1" strike="noStrike">
+              <a:latin typeface="Arial"/>
             </a:endParaRPr>
           </a:p>
         </p:txBody>
@@ -3494,57 +3191,51 @@
             <a:spLocks noGrp="1"/>
           </p:cNvSpPr>
           <p:nvPr>
-            <p:ph type="dt" idx="1"/>
+            <p:ph type="ftr" idx="1"/>
           </p:nvPr>
         </p:nvSpPr>
         <p:spPr>
           <a:xfrm>
-            <a:off x="628560" y="4767120"/>
-            <a:ext cx="2057040" cy="273600"/>
-          </a:xfrm>
-          <a:prstGeom prst="rect">
-            <a:avLst/>
-          </a:prstGeom>
-          <a:noFill/>
-          <a:ln w="0">
-            <a:noFill/>
-          </a:ln>
-        </p:spPr>
-        <p:txBody>
-          <a:bodyPr anchor="ctr">
+            <a:off x="3029040" y="4767120"/>
+            <a:ext cx="3085560" cy="273240"/>
+          </a:xfrm>
+          <a:prstGeom prst="rect">
+            <a:avLst/>
+          </a:prstGeom>
+          <a:noFill/>
+          <a:ln w="0">
+            <a:noFill/>
+          </a:ln>
+        </p:spPr>
+        <p:txBody>
+          <a:bodyPr lIns="90000" rIns="90000" tIns="45000" bIns="45000" anchor="ctr">
             <a:noAutofit/>
           </a:bodyPr>
           <a:lstStyle>
-            <a:lvl1pPr>
+            <a:lvl1pPr algn="ctr">
               <a:lnSpc>
                 <a:spcPct val="100000"/>
               </a:lnSpc>
               <a:buNone/>
-              <a:defRPr b="0" lang="en-US" sz="900" spc="-1" strike="noStrike">
-                <a:solidFill>
-                  <a:srgbClr val="8b8b8b"/>
-                </a:solidFill>
-                <a:latin typeface="Calibri"/>
+              <a:defRPr b="0" lang="ru-RU" sz="1400" spc="-1" strike="noStrike">
+                <a:latin typeface="Times New Roman"/>
               </a:defRPr>
             </a:lvl1pPr>
           </a:lstStyle>
           <a:p>
-            <a:pPr>
+            <a:pPr algn="ctr">
               <a:lnSpc>
                 <a:spcPct val="100000"/>
               </a:lnSpc>
               <a:buNone/>
             </a:pPr>
             <a:r>
-              <a:rPr b="0" lang="en-US" sz="900" spc="-1" strike="noStrike">
-                <a:solidFill>
-                  <a:srgbClr val="8b8b8b"/>
-                </a:solidFill>
-                <a:latin typeface="Calibri"/>
-              </a:rPr>
-              <a:t>&lt;дата/время&gt;</a:t>
-            </a:r>
-            <a:endParaRPr b="0" lang="ru-RU" sz="900" spc="-1" strike="noStrike">
+              <a:rPr b="0" lang="ru-RU" sz="1400" spc="-1" strike="noStrike">
+                <a:latin typeface="Times New Roman"/>
+              </a:rPr>
+              <a:t>&lt;footer&gt;</a:t>
+            </a:r>
+            <a:endParaRPr b="0" lang="en-US" sz="1400" spc="-1" strike="noStrike">
               <a:latin typeface="Times New Roman"/>
             </a:endParaRPr>
           </a:p>
@@ -3557,45 +3248,57 @@
             <a:spLocks noGrp="1"/>
           </p:cNvSpPr>
           <p:nvPr>
-            <p:ph type="ftr" idx="2"/>
+            <p:ph type="sldNum" idx="2"/>
           </p:nvPr>
         </p:nvSpPr>
         <p:spPr>
           <a:xfrm>
-            <a:off x="3029040" y="4767120"/>
-            <a:ext cx="3085920" cy="273600"/>
-          </a:xfrm>
-          <a:prstGeom prst="rect">
-            <a:avLst/>
-          </a:prstGeom>
-          <a:noFill/>
-          <a:ln w="0">
-            <a:noFill/>
-          </a:ln>
-        </p:spPr>
-        <p:txBody>
-          <a:bodyPr anchor="ctr">
+            <a:off x="6458040" y="4767120"/>
+            <a:ext cx="2056680" cy="273240"/>
+          </a:xfrm>
+          <a:prstGeom prst="rect">
+            <a:avLst/>
+          </a:prstGeom>
+          <a:noFill/>
+          <a:ln w="0">
+            <a:noFill/>
+          </a:ln>
+        </p:spPr>
+        <p:txBody>
+          <a:bodyPr lIns="90000" rIns="90000" tIns="45000" bIns="45000" anchor="ctr">
             <a:noAutofit/>
           </a:bodyPr>
           <a:lstStyle>
-            <a:lvl1pPr algn="ctr">
-              <a:buNone/>
-              <a:defRPr b="0" lang="ru-RU" sz="1400" spc="-1" strike="noStrike">
-                <a:latin typeface="Times New Roman"/>
+            <a:lvl1pPr algn="r">
+              <a:lnSpc>
+                <a:spcPct val="100000"/>
+              </a:lnSpc>
+              <a:buNone/>
+              <a:defRPr b="0" lang="en-US" sz="900" spc="-1" strike="noStrike">
+                <a:solidFill>
+                  <a:srgbClr val="8b8b8b"/>
+                </a:solidFill>
+                <a:latin typeface="Calibri"/>
               </a:defRPr>
             </a:lvl1pPr>
           </a:lstStyle>
           <a:p>
-            <a:pPr algn="ctr">
-              <a:buNone/>
-            </a:pPr>
-            <a:r>
-              <a:rPr b="0" lang="ru-RU" sz="1400" spc="-1" strike="noStrike">
-                <a:latin typeface="Times New Roman"/>
-              </a:rPr>
-              <a:t>&lt;нижний колонтитул&gt;</a:t>
-            </a:r>
-            <a:endParaRPr b="0" lang="ru-RU" sz="1400" spc="-1" strike="noStrike">
+            <a:pPr algn="r">
+              <a:lnSpc>
+                <a:spcPct val="100000"/>
+              </a:lnSpc>
+              <a:buNone/>
+            </a:pPr>
+            <a:fld id="{6C03DF34-1753-45C1-BC06-5A70BF5F757D}" type="slidenum">
+              <a:rPr b="0" lang="en-US" sz="900" spc="-1" strike="noStrike">
+                <a:solidFill>
+                  <a:srgbClr val="8b8b8b"/>
+                </a:solidFill>
+                <a:latin typeface="Calibri"/>
+              </a:rPr>
+              <a:t>&lt;number&gt;</a:t>
+            </a:fld>
+            <a:endParaRPr b="0" lang="en-US" sz="900" spc="-1" strike="noStrike">
               <a:latin typeface="Times New Roman"/>
             </a:endParaRPr>
           </a:p>
@@ -3608,57 +3311,41 @@
             <a:spLocks noGrp="1"/>
           </p:cNvSpPr>
           <p:nvPr>
-            <p:ph type="sldNum" idx="3"/>
+            <p:ph type="dt" idx="3"/>
           </p:nvPr>
         </p:nvSpPr>
         <p:spPr>
           <a:xfrm>
-            <a:off x="6458040" y="4767120"/>
-            <a:ext cx="2057040" cy="273600"/>
-          </a:xfrm>
-          <a:prstGeom prst="rect">
-            <a:avLst/>
-          </a:prstGeom>
-          <a:noFill/>
-          <a:ln w="0">
-            <a:noFill/>
-          </a:ln>
-        </p:spPr>
-        <p:txBody>
-          <a:bodyPr anchor="ctr">
+            <a:off x="628560" y="4767120"/>
+            <a:ext cx="2056680" cy="273240"/>
+          </a:xfrm>
+          <a:prstGeom prst="rect">
+            <a:avLst/>
+          </a:prstGeom>
+          <a:noFill/>
+          <a:ln w="0">
+            <a:noFill/>
+          </a:ln>
+        </p:spPr>
+        <p:txBody>
+          <a:bodyPr lIns="90000" rIns="90000" tIns="45000" bIns="45000" anchor="ctr">
             <a:noAutofit/>
           </a:bodyPr>
           <a:lstStyle>
-            <a:lvl1pPr algn="r">
-              <a:lnSpc>
-                <a:spcPct val="100000"/>
-              </a:lnSpc>
-              <a:buNone/>
-              <a:defRPr b="0" lang="en-US" sz="900" spc="-1" strike="noStrike">
-                <a:solidFill>
-                  <a:srgbClr val="8b8b8b"/>
-                </a:solidFill>
-                <a:latin typeface="Calibri"/>
+            <a:lvl1pPr>
+              <a:defRPr b="0" lang="en-US" sz="1400" spc="-1" strike="noStrike">
+                <a:latin typeface="Times New Roman"/>
               </a:defRPr>
             </a:lvl1pPr>
           </a:lstStyle>
           <a:p>
-            <a:pPr algn="r">
-              <a:lnSpc>
-                <a:spcPct val="100000"/>
-              </a:lnSpc>
-              <a:buNone/>
-            </a:pPr>
-            <a:fld id="{DAD028B5-FE25-44DB-A9B5-9FB990E27089}" type="slidenum">
-              <a:rPr b="0" lang="en-US" sz="900" spc="-1" strike="noStrike">
-                <a:solidFill>
-                  <a:srgbClr val="8b8b8b"/>
-                </a:solidFill>
-                <a:latin typeface="Calibri"/>
-              </a:rPr>
-              <a:t>&lt;номер&gt;</a:t>
-            </a:fld>
-            <a:endParaRPr b="0" lang="ru-RU" sz="900" spc="-1" strike="noStrike">
+            <a:r>
+              <a:rPr b="0" lang="en-US" sz="1400" spc="-1" strike="noStrike">
+                <a:latin typeface="Times New Roman"/>
+              </a:rPr>
+              <a:t>&lt;date/time&gt;</a:t>
+            </a:r>
+            <a:endParaRPr b="0" lang="en-US" sz="1400" spc="-1" strike="noStrike">
               <a:latin typeface="Times New Roman"/>
             </a:endParaRPr>
           </a:p>
@@ -3693,9 +3380,6 @@
           </a:bodyPr>
           <a:p>
             <a:pPr marL="432000" indent="-324000">
-              <a:lnSpc>
-                <a:spcPct val="90000"/>
-              </a:lnSpc>
               <a:spcBef>
                 <a:spcPts val="1417"/>
               </a:spcBef>
@@ -3707,26 +3391,17 @@
               <a:buChar char=""/>
             </a:pPr>
             <a:r>
-              <a:rPr b="0" lang="en-US" sz="2100" spc="-1" strike="noStrike">
-                <a:solidFill>
-                  <a:srgbClr val="000000"/>
-                </a:solidFill>
-                <a:latin typeface="Calibri"/>
-              </a:rPr>
-              <a:t>Для правки структуры щёлкните мышью</a:t>
-            </a:r>
-            <a:endParaRPr b="0" lang="en-US" sz="2100" spc="-1" strike="noStrike">
-              <a:solidFill>
-                <a:srgbClr val="000000"/>
-              </a:solidFill>
-              <a:latin typeface="Calibri"/>
+              <a:rPr b="0" lang="en-US" sz="3200" spc="-1" strike="noStrike">
+                <a:latin typeface="Arial"/>
+              </a:rPr>
+              <a:t>Click to edit the outline text format</a:t>
+            </a:r>
+            <a:endParaRPr b="0" lang="en-US" sz="3200" spc="-1" strike="noStrike">
+              <a:latin typeface="Arial"/>
             </a:endParaRPr>
           </a:p>
           <a:p>
             <a:pPr lvl="1" marL="864000" indent="-324000">
-              <a:lnSpc>
-                <a:spcPct val="90000"/>
-              </a:lnSpc>
               <a:spcBef>
                 <a:spcPts val="1134"/>
               </a:spcBef>
@@ -3738,26 +3413,17 @@
               <a:buChar char=""/>
             </a:pPr>
             <a:r>
-              <a:rPr b="0" lang="en-US" sz="1500" spc="-1" strike="noStrike">
-                <a:solidFill>
-                  <a:srgbClr val="000000"/>
-                </a:solidFill>
-                <a:latin typeface="Calibri"/>
-              </a:rPr>
-              <a:t>Второй уровень структуры</a:t>
-            </a:r>
-            <a:endParaRPr b="0" lang="en-US" sz="1500" spc="-1" strike="noStrike">
-              <a:solidFill>
-                <a:srgbClr val="000000"/>
-              </a:solidFill>
-              <a:latin typeface="Calibri"/>
+              <a:rPr b="0" lang="en-US" sz="2800" spc="-1" strike="noStrike">
+                <a:latin typeface="Arial"/>
+              </a:rPr>
+              <a:t>Second Outline Level</a:t>
+            </a:r>
+            <a:endParaRPr b="0" lang="en-US" sz="2800" spc="-1" strike="noStrike">
+              <a:latin typeface="Arial"/>
             </a:endParaRPr>
           </a:p>
           <a:p>
             <a:pPr lvl="2" marL="1296000" indent="-288000">
-              <a:lnSpc>
-                <a:spcPct val="90000"/>
-              </a:lnSpc>
               <a:spcBef>
                 <a:spcPts val="850"/>
               </a:spcBef>
@@ -3769,26 +3435,17 @@
               <a:buChar char=""/>
             </a:pPr>
             <a:r>
-              <a:rPr b="0" lang="en-US" sz="1350" spc="-1" strike="noStrike">
-                <a:solidFill>
-                  <a:srgbClr val="000000"/>
-                </a:solidFill>
-                <a:latin typeface="Calibri"/>
-              </a:rPr>
-              <a:t>Третий уровень структуры</a:t>
-            </a:r>
-            <a:endParaRPr b="0" lang="en-US" sz="1350" spc="-1" strike="noStrike">
-              <a:solidFill>
-                <a:srgbClr val="000000"/>
-              </a:solidFill>
-              <a:latin typeface="Calibri"/>
+              <a:rPr b="0" lang="en-US" sz="2400" spc="-1" strike="noStrike">
+                <a:latin typeface="Arial"/>
+              </a:rPr>
+              <a:t>Third Outline Level</a:t>
+            </a:r>
+            <a:endParaRPr b="0" lang="en-US" sz="2400" spc="-1" strike="noStrike">
+              <a:latin typeface="Arial"/>
             </a:endParaRPr>
           </a:p>
           <a:p>
             <a:pPr lvl="3" marL="1728000" indent="-216000">
-              <a:lnSpc>
-                <a:spcPct val="90000"/>
-              </a:lnSpc>
               <a:spcBef>
                 <a:spcPts val="567"/>
               </a:spcBef>
@@ -3800,26 +3457,17 @@
               <a:buChar char=""/>
             </a:pPr>
             <a:r>
-              <a:rPr b="0" lang="en-US" sz="1350" spc="-1" strike="noStrike">
-                <a:solidFill>
-                  <a:srgbClr val="000000"/>
-                </a:solidFill>
-                <a:latin typeface="Calibri"/>
-              </a:rPr>
-              <a:t>Четвёртый уровень структуры</a:t>
-            </a:r>
-            <a:endParaRPr b="0" lang="en-US" sz="1350" spc="-1" strike="noStrike">
-              <a:solidFill>
-                <a:srgbClr val="000000"/>
-              </a:solidFill>
-              <a:latin typeface="Calibri"/>
+              <a:rPr b="0" lang="en-US" sz="2000" spc="-1" strike="noStrike">
+                <a:latin typeface="Arial"/>
+              </a:rPr>
+              <a:t>Fourth Outline Level</a:t>
+            </a:r>
+            <a:endParaRPr b="0" lang="en-US" sz="2000" spc="-1" strike="noStrike">
+              <a:latin typeface="Arial"/>
             </a:endParaRPr>
           </a:p>
           <a:p>
             <a:pPr lvl="4" marL="2160000" indent="-216000">
-              <a:lnSpc>
-                <a:spcPct val="90000"/>
-              </a:lnSpc>
               <a:spcBef>
                 <a:spcPts val="283"/>
               </a:spcBef>
@@ -3832,25 +3480,16 @@
             </a:pPr>
             <a:r>
               <a:rPr b="0" lang="en-US" sz="2000" spc="-1" strike="noStrike">
-                <a:solidFill>
-                  <a:srgbClr val="000000"/>
-                </a:solidFill>
-                <a:latin typeface="Calibri"/>
-              </a:rPr>
-              <a:t>Пятый уровень структуры</a:t>
+                <a:latin typeface="Arial"/>
+              </a:rPr>
+              <a:t>Fifth Outline Level</a:t>
             </a:r>
             <a:endParaRPr b="0" lang="en-US" sz="2000" spc="-1" strike="noStrike">
-              <a:solidFill>
-                <a:srgbClr val="000000"/>
-              </a:solidFill>
-              <a:latin typeface="Calibri"/>
+              <a:latin typeface="Arial"/>
             </a:endParaRPr>
           </a:p>
           <a:p>
             <a:pPr lvl="5" marL="2592000" indent="-216000">
-              <a:lnSpc>
-                <a:spcPct val="90000"/>
-              </a:lnSpc>
               <a:spcBef>
                 <a:spcPts val="283"/>
               </a:spcBef>
@@ -3863,25 +3502,16 @@
             </a:pPr>
             <a:r>
               <a:rPr b="0" lang="en-US" sz="2000" spc="-1" strike="noStrike">
-                <a:solidFill>
-                  <a:srgbClr val="000000"/>
-                </a:solidFill>
-                <a:latin typeface="Calibri"/>
-              </a:rPr>
-              <a:t>Шестой уровень структуры</a:t>
+                <a:latin typeface="Arial"/>
+              </a:rPr>
+              <a:t>Sixth Outline Level</a:t>
             </a:r>
             <a:endParaRPr b="0" lang="en-US" sz="2000" spc="-1" strike="noStrike">
-              <a:solidFill>
-                <a:srgbClr val="000000"/>
-              </a:solidFill>
-              <a:latin typeface="Calibri"/>
+              <a:latin typeface="Arial"/>
             </a:endParaRPr>
           </a:p>
           <a:p>
             <a:pPr lvl="6" marL="3024000" indent="-216000">
-              <a:lnSpc>
-                <a:spcPct val="90000"/>
-              </a:lnSpc>
               <a:spcBef>
                 <a:spcPts val="283"/>
               </a:spcBef>
@@ -3894,18 +3524,12 @@
             </a:pPr>
             <a:r>
               <a:rPr b="0" lang="en-US" sz="2000" spc="-1" strike="noStrike">
-                <a:solidFill>
-                  <a:srgbClr val="000000"/>
-                </a:solidFill>
-                <a:latin typeface="Calibri"/>
-              </a:rPr>
-              <a:t>Седьмой уровень структуры</a:t>
+                <a:latin typeface="Arial"/>
+              </a:rPr>
+              <a:t>Seventh Outline Level</a:t>
             </a:r>
             <a:endParaRPr b="0" lang="en-US" sz="2000" spc="-1" strike="noStrike">
-              <a:solidFill>
-                <a:srgbClr val="000000"/>
-              </a:solidFill>
-              <a:latin typeface="Calibri"/>
+              <a:latin typeface="Arial"/>
             </a:endParaRPr>
           </a:p>
         </p:txBody>
@@ -3963,7 +3587,7 @@
         <p:spPr>
           <a:xfrm>
             <a:off x="186840" y="185400"/>
-            <a:ext cx="8770320" cy="4758120"/>
+            <a:ext cx="8769960" cy="4757760"/>
           </a:xfrm>
           <a:prstGeom prst="roundRect">
             <a:avLst>
@@ -4001,7 +3625,7 @@
         <p:spPr>
           <a:xfrm>
             <a:off x="460080" y="658080"/>
-            <a:ext cx="8469000" cy="3306960"/>
+            <a:ext cx="8468640" cy="3306600"/>
           </a:xfrm>
           <a:prstGeom prst="rect">
             <a:avLst/>
@@ -4038,58 +3662,7 @@
               </a:rPr>
               <a:t>TITLE</a:t>
             </a:r>
-            <a:endParaRPr b="0" lang="ru-RU" sz="5400" spc="-1" strike="noStrike">
-              <a:latin typeface="Arial"/>
-            </a:endParaRPr>
-          </a:p>
-        </p:txBody>
-      </p:sp>
-      <p:sp>
-        <p:nvSpPr>
-          <p:cNvPr id="49" name="Прямоугольник 5"/>
-          <p:cNvSpPr/>
-          <p:nvPr/>
-        </p:nvSpPr>
-        <p:spPr>
-          <a:xfrm>
-            <a:off x="460080" y="358920"/>
-            <a:ext cx="2999160" cy="269640"/>
-          </a:xfrm>
-          <a:prstGeom prst="rect">
-            <a:avLst/>
-          </a:prstGeom>
-          <a:noFill/>
-          <a:ln w="0">
-            <a:noFill/>
-          </a:ln>
-        </p:spPr>
-        <p:style>
-          <a:lnRef idx="0"/>
-          <a:fillRef idx="0"/>
-          <a:effectRef idx="0"/>
-          <a:fontRef idx="minor"/>
-        </p:style>
-        <p:txBody>
-          <a:bodyPr lIns="90000" rIns="90000" tIns="45000" bIns="45000" anchor="t">
-            <a:noAutofit/>
-          </a:bodyPr>
-          <a:p>
-            <a:pPr>
-              <a:lnSpc>
-                <a:spcPts val="1650"/>
-              </a:lnSpc>
-              <a:buNone/>
-            </a:pPr>
-            <a:r>
-              <a:rPr b="0" lang="ru-RU" sz="1400" spc="-1" strike="noStrike">
-                <a:solidFill>
-                  <a:srgbClr val="f2f2f2"/>
-                </a:solidFill>
-                <a:latin typeface="Arial"/>
-              </a:rPr>
-              <a:t>Тема:</a:t>
-            </a:r>
-            <a:endParaRPr b="0" lang="ru-RU" sz="1400" spc="-1" strike="noStrike">
+            <a:endParaRPr b="0" lang="en-US" sz="5400" spc="-1" strike="noStrike">
               <a:latin typeface="Arial"/>
             </a:endParaRPr>
           </a:p>
@@ -4134,14 +3707,14 @@
       </p:grpSpPr>
       <p:sp>
         <p:nvSpPr>
-          <p:cNvPr id="147" name="Прямоугольник со скругленными углами 3"/>
+          <p:cNvPr id="146" name="Прямоугольник со скругленными углами 3"/>
           <p:cNvSpPr/>
           <p:nvPr/>
         </p:nvSpPr>
         <p:spPr>
           <a:xfrm>
             <a:off x="0" y="0"/>
-            <a:ext cx="9143640" cy="1961640"/>
+            <a:ext cx="9143280" cy="1961280"/>
           </a:xfrm>
           <a:prstGeom prst="roundRect">
             <a:avLst>
@@ -4192,22 +3765,22 @@
               </a:rPr>
               <a:t>PIC</a:t>
             </a:r>
-            <a:endParaRPr b="0" lang="ru-RU" sz="1800" spc="-1" strike="noStrike">
-              <a:latin typeface="Arial"/>
-            </a:endParaRPr>
-          </a:p>
-        </p:txBody>
-      </p:sp>
-      <p:sp>
-        <p:nvSpPr>
-          <p:cNvPr id="148" name="TextBox 10"/>
+            <a:endParaRPr b="0" lang="en-US" sz="1800" spc="-1" strike="noStrike">
+              <a:latin typeface="Arial"/>
+            </a:endParaRPr>
+          </a:p>
+        </p:txBody>
+      </p:sp>
+      <p:sp>
+        <p:nvSpPr>
+          <p:cNvPr id="147" name="TextBox 10"/>
           <p:cNvSpPr/>
           <p:nvPr/>
         </p:nvSpPr>
         <p:spPr>
           <a:xfrm>
             <a:off x="384840" y="2571840"/>
-            <a:ext cx="2665080" cy="713880"/>
+            <a:ext cx="2664720" cy="713520"/>
           </a:xfrm>
           <a:prstGeom prst="rect">
             <a:avLst/>
@@ -4244,22 +3817,22 @@
               </a:rPr>
               <a:t>SUBTITLE1</a:t>
             </a:r>
-            <a:endParaRPr b="0" lang="ru-RU" sz="1400" spc="-1" strike="noStrike">
-              <a:latin typeface="Arial"/>
-            </a:endParaRPr>
-          </a:p>
-        </p:txBody>
-      </p:sp>
-      <p:sp>
-        <p:nvSpPr>
-          <p:cNvPr id="149" name="TextBox 10"/>
+            <a:endParaRPr b="0" lang="en-US" sz="1400" spc="-1" strike="noStrike">
+              <a:latin typeface="Arial"/>
+            </a:endParaRPr>
+          </a:p>
+        </p:txBody>
+      </p:sp>
+      <p:sp>
+        <p:nvSpPr>
+          <p:cNvPr id="148" name="TextBox 10"/>
           <p:cNvSpPr/>
           <p:nvPr/>
         </p:nvSpPr>
         <p:spPr>
           <a:xfrm>
             <a:off x="384840" y="3456360"/>
-            <a:ext cx="2665080" cy="1565280"/>
+            <a:ext cx="2664720" cy="1564920"/>
           </a:xfrm>
           <a:prstGeom prst="rect">
             <a:avLst/>
@@ -4306,22 +3879,22 @@
               </a:rPr>
               <a:t>1</a:t>
             </a:r>
-            <a:endParaRPr b="0" lang="ru-RU" sz="1100" spc="-1" strike="noStrike">
-              <a:latin typeface="Arial"/>
-            </a:endParaRPr>
-          </a:p>
-        </p:txBody>
-      </p:sp>
-      <p:sp>
-        <p:nvSpPr>
-          <p:cNvPr id="150" name="TextBox 10"/>
+            <a:endParaRPr b="0" lang="en-US" sz="1100" spc="-1" strike="noStrike">
+              <a:latin typeface="Arial"/>
+            </a:endParaRPr>
+          </a:p>
+        </p:txBody>
+      </p:sp>
+      <p:sp>
+        <p:nvSpPr>
+          <p:cNvPr id="149" name="TextBox 10"/>
           <p:cNvSpPr/>
           <p:nvPr/>
         </p:nvSpPr>
         <p:spPr>
           <a:xfrm>
             <a:off x="3239280" y="2571840"/>
-            <a:ext cx="2665080" cy="713880"/>
+            <a:ext cx="2664720" cy="713520"/>
           </a:xfrm>
           <a:prstGeom prst="rect">
             <a:avLst/>
@@ -4358,22 +3931,22 @@
               </a:rPr>
               <a:t>SUBTITLE2</a:t>
             </a:r>
-            <a:endParaRPr b="0" lang="ru-RU" sz="1400" spc="-1" strike="noStrike">
-              <a:latin typeface="Arial"/>
-            </a:endParaRPr>
-          </a:p>
-        </p:txBody>
-      </p:sp>
-      <p:sp>
-        <p:nvSpPr>
-          <p:cNvPr id="151" name="TextBox 10"/>
+            <a:endParaRPr b="0" lang="en-US" sz="1400" spc="-1" strike="noStrike">
+              <a:latin typeface="Arial"/>
+            </a:endParaRPr>
+          </a:p>
+        </p:txBody>
+      </p:sp>
+      <p:sp>
+        <p:nvSpPr>
+          <p:cNvPr id="150" name="TextBox 10"/>
           <p:cNvSpPr/>
           <p:nvPr/>
         </p:nvSpPr>
         <p:spPr>
           <a:xfrm>
             <a:off x="3239280" y="3456360"/>
-            <a:ext cx="2665080" cy="1565280"/>
+            <a:ext cx="2664720" cy="1564920"/>
           </a:xfrm>
           <a:prstGeom prst="rect">
             <a:avLst/>
@@ -4420,22 +3993,22 @@
               </a:rPr>
               <a:t>2</a:t>
             </a:r>
-            <a:endParaRPr b="0" lang="ru-RU" sz="1100" spc="-1" strike="noStrike">
-              <a:latin typeface="Arial"/>
-            </a:endParaRPr>
-          </a:p>
-        </p:txBody>
-      </p:sp>
-      <p:sp>
-        <p:nvSpPr>
-          <p:cNvPr id="152" name="TextBox 10"/>
+            <a:endParaRPr b="0" lang="en-US" sz="1100" spc="-1" strike="noStrike">
+              <a:latin typeface="Arial"/>
+            </a:endParaRPr>
+          </a:p>
+        </p:txBody>
+      </p:sp>
+      <p:sp>
+        <p:nvSpPr>
+          <p:cNvPr id="151" name="TextBox 10"/>
           <p:cNvSpPr/>
           <p:nvPr/>
         </p:nvSpPr>
         <p:spPr>
           <a:xfrm>
             <a:off x="6093720" y="2571840"/>
-            <a:ext cx="2665080" cy="713880"/>
+            <a:ext cx="2664720" cy="713520"/>
           </a:xfrm>
           <a:prstGeom prst="rect">
             <a:avLst/>
@@ -4472,22 +4045,22 @@
               </a:rPr>
               <a:t>SUBTITLE3</a:t>
             </a:r>
-            <a:endParaRPr b="0" lang="ru-RU" sz="1400" spc="-1" strike="noStrike">
-              <a:latin typeface="Arial"/>
-            </a:endParaRPr>
-          </a:p>
-        </p:txBody>
-      </p:sp>
-      <p:sp>
-        <p:nvSpPr>
-          <p:cNvPr id="153" name="TextBox 10"/>
+            <a:endParaRPr b="0" lang="en-US" sz="1400" spc="-1" strike="noStrike">
+              <a:latin typeface="Arial"/>
+            </a:endParaRPr>
+          </a:p>
+        </p:txBody>
+      </p:sp>
+      <p:sp>
+        <p:nvSpPr>
+          <p:cNvPr id="152" name="TextBox 10"/>
           <p:cNvSpPr/>
           <p:nvPr/>
         </p:nvSpPr>
         <p:spPr>
           <a:xfrm>
             <a:off x="6093720" y="3456360"/>
-            <a:ext cx="2665080" cy="1565280"/>
+            <a:ext cx="2664720" cy="1564920"/>
           </a:xfrm>
           <a:prstGeom prst="rect">
             <a:avLst/>
@@ -4534,15 +4107,15 @@
               </a:rPr>
               <a:t>3</a:t>
             </a:r>
-            <a:endParaRPr b="0" lang="ru-RU" sz="1100" spc="-1" strike="noStrike">
-              <a:latin typeface="Arial"/>
-            </a:endParaRPr>
-          </a:p>
-        </p:txBody>
-      </p:sp>
-      <p:sp>
-        <p:nvSpPr>
-          <p:cNvPr id="154" name="Прямая соединительная линия 2"/>
+            <a:endParaRPr b="0" lang="en-US" sz="1100" spc="-1" strike="noStrike">
+              <a:latin typeface="Arial"/>
+            </a:endParaRPr>
+          </a:p>
+        </p:txBody>
+      </p:sp>
+      <p:sp>
+        <p:nvSpPr>
+          <p:cNvPr id="153" name="Прямая соединительная линия 2"/>
           <p:cNvSpPr/>
           <p:nvPr/>
         </p:nvSpPr>
@@ -4575,7 +4148,7 @@
       </p:sp>
       <p:sp>
         <p:nvSpPr>
-          <p:cNvPr id="155" name="Прямая соединительная линия 11"/>
+          <p:cNvPr id="154" name="Прямая соединительная линия 11"/>
           <p:cNvSpPr/>
           <p:nvPr/>
         </p:nvSpPr>
@@ -4608,7 +4181,7 @@
       </p:sp>
       <p:sp>
         <p:nvSpPr>
-          <p:cNvPr id="156" name="Прямая соединительная линия 30"/>
+          <p:cNvPr id="155" name="Прямая соединительная линия 30"/>
           <p:cNvSpPr/>
           <p:nvPr/>
         </p:nvSpPr>
@@ -4641,14 +4214,14 @@
       </p:sp>
       <p:sp>
         <p:nvSpPr>
-          <p:cNvPr id="157" name="TextBox 12"/>
+          <p:cNvPr id="156" name="TextBox 12"/>
           <p:cNvSpPr/>
           <p:nvPr/>
         </p:nvSpPr>
         <p:spPr>
           <a:xfrm>
             <a:off x="384840" y="2178000"/>
-            <a:ext cx="8465760" cy="480960"/>
+            <a:ext cx="8465400" cy="480600"/>
           </a:xfrm>
           <a:prstGeom prst="rect">
             <a:avLst/>
@@ -4681,10 +4254,11 @@
                   <a:srgbClr val="ffffff"/>
                 </a:solidFill>
                 <a:latin typeface="Arial"/>
+                <a:ea typeface="DejaVu Sans"/>
               </a:rPr>
               <a:t>TITLE</a:t>
             </a:r>
-            <a:endParaRPr b="0" lang="ru-RU" sz="2200" spc="-1" strike="noStrike">
+            <a:endParaRPr b="0" lang="en-US" sz="2200" spc="-1" strike="noStrike">
               <a:latin typeface="Arial"/>
             </a:endParaRPr>
           </a:p>
@@ -4729,14 +4303,14 @@
       </p:grpSpPr>
       <p:sp>
         <p:nvSpPr>
-          <p:cNvPr id="158" name="Прямоугольник со скругленными углами 3"/>
+          <p:cNvPr id="157" name="Прямоугольник со скругленными углами 3"/>
           <p:cNvSpPr/>
           <p:nvPr/>
         </p:nvSpPr>
         <p:spPr>
           <a:xfrm>
             <a:off x="186840" y="185400"/>
-            <a:ext cx="8770320" cy="4758120"/>
+            <a:ext cx="8769960" cy="4757760"/>
           </a:xfrm>
           <a:prstGeom prst="roundRect">
             <a:avLst>
@@ -4767,14 +4341,14 @@
       </p:sp>
       <p:sp>
         <p:nvSpPr>
-          <p:cNvPr id="159" name="Прямоугольник 10"/>
+          <p:cNvPr id="158" name="Прямоугольник 10"/>
           <p:cNvSpPr/>
           <p:nvPr/>
         </p:nvSpPr>
         <p:spPr>
           <a:xfrm>
             <a:off x="460080" y="658080"/>
-            <a:ext cx="8469000" cy="3306960"/>
+            <a:ext cx="8468640" cy="3306600"/>
           </a:xfrm>
           <a:prstGeom prst="rect">
             <a:avLst/>
@@ -4811,7 +4385,7 @@
               </a:rPr>
               <a:t>TITLE</a:t>
             </a:r>
-            <a:endParaRPr b="0" lang="ru-RU" sz="5400" spc="-1" strike="noStrike">
+            <a:endParaRPr b="0" lang="en-US" sz="5400" spc="-1" strike="noStrike">
               <a:latin typeface="Arial"/>
             </a:endParaRPr>
           </a:p>
@@ -4856,14 +4430,14 @@
       </p:grpSpPr>
       <p:sp>
         <p:nvSpPr>
-          <p:cNvPr id="50" name="Прямоугольник со скругленными углами 3"/>
+          <p:cNvPr id="49" name="Прямоугольник со скругленными углами 3"/>
           <p:cNvSpPr/>
           <p:nvPr/>
         </p:nvSpPr>
         <p:spPr>
           <a:xfrm>
             <a:off x="3507480" y="0"/>
-            <a:ext cx="5636160" cy="5143320"/>
+            <a:ext cx="5635800" cy="5142960"/>
           </a:xfrm>
           <a:prstGeom prst="roundRect">
             <a:avLst>
@@ -4912,22 +4486,22 @@
               </a:rPr>
               <a:t>PIC</a:t>
             </a:r>
-            <a:endParaRPr b="0" lang="ru-RU" sz="1800" spc="-1" strike="noStrike">
-              <a:latin typeface="Arial"/>
-            </a:endParaRPr>
-          </a:p>
-        </p:txBody>
-      </p:sp>
-      <p:sp>
-        <p:nvSpPr>
-          <p:cNvPr id="51" name="Прямоугольник: скругленные углы 2"/>
+            <a:endParaRPr b="0" lang="en-US" sz="1800" spc="-1" strike="noStrike">
+              <a:latin typeface="Arial"/>
+            </a:endParaRPr>
+          </a:p>
+        </p:txBody>
+      </p:sp>
+      <p:sp>
+        <p:nvSpPr>
+          <p:cNvPr id="50" name="Прямоугольник: скругленные углы 2"/>
           <p:cNvSpPr/>
           <p:nvPr/>
         </p:nvSpPr>
         <p:spPr>
           <a:xfrm>
             <a:off x="3722040" y="257040"/>
-            <a:ext cx="5186160" cy="4650120"/>
+            <a:ext cx="5185800" cy="4649760"/>
           </a:xfrm>
           <a:prstGeom prst="roundRect">
             <a:avLst>
@@ -4961,14 +4535,14 @@
       </p:sp>
       <p:sp>
         <p:nvSpPr>
-          <p:cNvPr id="52" name="Овал 1"/>
+          <p:cNvPr id="51" name="Овал 1"/>
           <p:cNvSpPr/>
           <p:nvPr/>
         </p:nvSpPr>
         <p:spPr>
           <a:xfrm>
             <a:off x="4122000" y="631080"/>
-            <a:ext cx="899640" cy="899640"/>
+            <a:ext cx="899280" cy="899280"/>
           </a:xfrm>
           <a:prstGeom prst="ellipse">
             <a:avLst/>
@@ -5011,25 +4585,26 @@
                   <a:srgbClr val="ffffff"/>
                 </a:solidFill>
                 <a:latin typeface="Calibri"/>
+                <a:ea typeface="DejaVu Sans"/>
               </a:rPr>
               <a:t>01</a:t>
             </a:r>
-            <a:endParaRPr b="0" lang="ru-RU" sz="1800" spc="-1" strike="noStrike">
-              <a:latin typeface="Arial"/>
-            </a:endParaRPr>
-          </a:p>
-        </p:txBody>
-      </p:sp>
-      <p:sp>
-        <p:nvSpPr>
-          <p:cNvPr id="53" name="Овал 23"/>
+            <a:endParaRPr b="0" lang="en-US" sz="1800" spc="-1" strike="noStrike">
+              <a:latin typeface="Arial"/>
+            </a:endParaRPr>
+          </a:p>
+        </p:txBody>
+      </p:sp>
+      <p:sp>
+        <p:nvSpPr>
+          <p:cNvPr id="52" name="Овал 23"/>
           <p:cNvSpPr/>
           <p:nvPr/>
         </p:nvSpPr>
         <p:spPr>
           <a:xfrm>
             <a:off x="4122000" y="2127600"/>
-            <a:ext cx="899640" cy="887760"/>
+            <a:ext cx="899280" cy="887400"/>
           </a:xfrm>
           <a:prstGeom prst="ellipse">
             <a:avLst/>
@@ -5072,25 +4647,26 @@
                   <a:srgbClr val="ffffff"/>
                 </a:solidFill>
                 <a:latin typeface="Calibri"/>
+                <a:ea typeface="DejaVu Sans"/>
               </a:rPr>
               <a:t>02</a:t>
             </a:r>
-            <a:endParaRPr b="0" lang="ru-RU" sz="1800" spc="-1" strike="noStrike">
-              <a:latin typeface="Arial"/>
-            </a:endParaRPr>
-          </a:p>
-        </p:txBody>
-      </p:sp>
-      <p:sp>
-        <p:nvSpPr>
-          <p:cNvPr id="54" name="Овал 29"/>
+            <a:endParaRPr b="0" lang="en-US" sz="1800" spc="-1" strike="noStrike">
+              <a:latin typeface="Arial"/>
+            </a:endParaRPr>
+          </a:p>
+        </p:txBody>
+      </p:sp>
+      <p:sp>
+        <p:nvSpPr>
+          <p:cNvPr id="53" name="Овал 29"/>
           <p:cNvSpPr/>
           <p:nvPr/>
         </p:nvSpPr>
         <p:spPr>
           <a:xfrm>
             <a:off x="4122000" y="3612240"/>
-            <a:ext cx="899640" cy="899640"/>
+            <a:ext cx="899280" cy="899280"/>
           </a:xfrm>
           <a:prstGeom prst="ellipse">
             <a:avLst/>
@@ -5133,25 +4709,26 @@
                   <a:srgbClr val="ffffff"/>
                 </a:solidFill>
                 <a:latin typeface="Calibri"/>
+                <a:ea typeface="DejaVu Sans"/>
               </a:rPr>
               <a:t>03</a:t>
             </a:r>
-            <a:endParaRPr b="0" lang="ru-RU" sz="1800" spc="-1" strike="noStrike">
-              <a:latin typeface="Arial"/>
-            </a:endParaRPr>
-          </a:p>
-        </p:txBody>
-      </p:sp>
-      <p:sp>
-        <p:nvSpPr>
-          <p:cNvPr id="55" name="TextBox 10"/>
+            <a:endParaRPr b="0" lang="en-US" sz="1800" spc="-1" strike="noStrike">
+              <a:latin typeface="Arial"/>
+            </a:endParaRPr>
+          </a:p>
+        </p:txBody>
+      </p:sp>
+      <p:sp>
+        <p:nvSpPr>
+          <p:cNvPr id="54" name="TextBox 10"/>
           <p:cNvSpPr/>
           <p:nvPr/>
         </p:nvSpPr>
         <p:spPr>
           <a:xfrm>
             <a:off x="5110920" y="489600"/>
-            <a:ext cx="3579120" cy="550800"/>
+            <a:ext cx="3578760" cy="550440"/>
           </a:xfrm>
           <a:prstGeom prst="rect">
             <a:avLst/>
@@ -5198,22 +4775,22 @@
               </a:rPr>
               <a:t>1</a:t>
             </a:r>
-            <a:endParaRPr b="0" lang="ru-RU" sz="1400" spc="-1" strike="noStrike">
-              <a:latin typeface="Arial"/>
-            </a:endParaRPr>
-          </a:p>
-        </p:txBody>
-      </p:sp>
-      <p:sp>
-        <p:nvSpPr>
-          <p:cNvPr id="56" name="TextBox 10"/>
+            <a:endParaRPr b="0" lang="en-US" sz="1400" spc="-1" strike="noStrike">
+              <a:latin typeface="Arial"/>
+            </a:endParaRPr>
+          </a:p>
+        </p:txBody>
+      </p:sp>
+      <p:sp>
+        <p:nvSpPr>
+          <p:cNvPr id="55" name="TextBox 10"/>
           <p:cNvSpPr/>
           <p:nvPr/>
         </p:nvSpPr>
         <p:spPr>
           <a:xfrm>
             <a:off x="5110920" y="1025280"/>
-            <a:ext cx="3579120" cy="789840"/>
+            <a:ext cx="3578760" cy="789480"/>
           </a:xfrm>
           <a:prstGeom prst="rect">
             <a:avLst/>
@@ -5260,22 +4837,22 @@
               </a:rPr>
               <a:t>1</a:t>
             </a:r>
-            <a:endParaRPr b="0" lang="ru-RU" sz="1100" spc="-1" strike="noStrike">
-              <a:latin typeface="Arial"/>
-            </a:endParaRPr>
-          </a:p>
-        </p:txBody>
-      </p:sp>
-      <p:sp>
-        <p:nvSpPr>
-          <p:cNvPr id="57" name="TextBox 10"/>
+            <a:endParaRPr b="0" lang="en-US" sz="1100" spc="-1" strike="noStrike">
+              <a:latin typeface="Arial"/>
+            </a:endParaRPr>
+          </a:p>
+        </p:txBody>
+      </p:sp>
+      <p:sp>
+        <p:nvSpPr>
+          <p:cNvPr id="56" name="TextBox 10"/>
           <p:cNvSpPr/>
           <p:nvPr/>
         </p:nvSpPr>
         <p:spPr>
           <a:xfrm>
             <a:off x="5107320" y="1985400"/>
-            <a:ext cx="3579120" cy="550800"/>
+            <a:ext cx="3578760" cy="550440"/>
           </a:xfrm>
           <a:prstGeom prst="rect">
             <a:avLst/>
@@ -5312,22 +4889,22 @@
               </a:rPr>
               <a:t>SUBTITLE2</a:t>
             </a:r>
-            <a:endParaRPr b="0" lang="ru-RU" sz="1400" spc="-1" strike="noStrike">
-              <a:latin typeface="Arial"/>
-            </a:endParaRPr>
-          </a:p>
-        </p:txBody>
-      </p:sp>
-      <p:sp>
-        <p:nvSpPr>
-          <p:cNvPr id="58" name="TextBox 10"/>
+            <a:endParaRPr b="0" lang="en-US" sz="1400" spc="-1" strike="noStrike">
+              <a:latin typeface="Arial"/>
+            </a:endParaRPr>
+          </a:p>
+        </p:txBody>
+      </p:sp>
+      <p:sp>
+        <p:nvSpPr>
+          <p:cNvPr id="57" name="TextBox 10"/>
           <p:cNvSpPr/>
           <p:nvPr/>
         </p:nvSpPr>
         <p:spPr>
           <a:xfrm>
             <a:off x="5107320" y="2517840"/>
-            <a:ext cx="3579120" cy="843480"/>
+            <a:ext cx="3578760" cy="843120"/>
           </a:xfrm>
           <a:prstGeom prst="rect">
             <a:avLst/>
@@ -5374,22 +4951,22 @@
               </a:rPr>
               <a:t>2</a:t>
             </a:r>
-            <a:endParaRPr b="0" lang="ru-RU" sz="1100" spc="-1" strike="noStrike">
-              <a:latin typeface="Arial"/>
-            </a:endParaRPr>
-          </a:p>
-        </p:txBody>
-      </p:sp>
-      <p:sp>
-        <p:nvSpPr>
-          <p:cNvPr id="59" name="TextBox 10"/>
+            <a:endParaRPr b="0" lang="en-US" sz="1100" spc="-1" strike="noStrike">
+              <a:latin typeface="Arial"/>
+            </a:endParaRPr>
+          </a:p>
+        </p:txBody>
+      </p:sp>
+      <p:sp>
+        <p:nvSpPr>
+          <p:cNvPr id="58" name="TextBox 10"/>
           <p:cNvSpPr/>
           <p:nvPr/>
         </p:nvSpPr>
         <p:spPr>
           <a:xfrm>
             <a:off x="5107320" y="3470760"/>
-            <a:ext cx="3579120" cy="550800"/>
+            <a:ext cx="3578760" cy="550440"/>
           </a:xfrm>
           <a:prstGeom prst="rect">
             <a:avLst/>
@@ -5426,22 +5003,22 @@
               </a:rPr>
               <a:t>SUBTITLE3</a:t>
             </a:r>
-            <a:endParaRPr b="0" lang="ru-RU" sz="1400" spc="-1" strike="noStrike">
-              <a:latin typeface="Arial"/>
-            </a:endParaRPr>
-          </a:p>
-        </p:txBody>
-      </p:sp>
-      <p:sp>
-        <p:nvSpPr>
-          <p:cNvPr id="60" name="TextBox 10"/>
+            <a:endParaRPr b="0" lang="en-US" sz="1400" spc="-1" strike="noStrike">
+              <a:latin typeface="Arial"/>
+            </a:endParaRPr>
+          </a:p>
+        </p:txBody>
+      </p:sp>
+      <p:sp>
+        <p:nvSpPr>
+          <p:cNvPr id="59" name="TextBox 10"/>
           <p:cNvSpPr/>
           <p:nvPr/>
         </p:nvSpPr>
         <p:spPr>
           <a:xfrm>
             <a:off x="5107320" y="4003560"/>
-            <a:ext cx="3579120" cy="794880"/>
+            <a:ext cx="3578760" cy="794520"/>
           </a:xfrm>
           <a:prstGeom prst="rect">
             <a:avLst/>
@@ -5488,22 +5065,22 @@
               </a:rPr>
               <a:t>3</a:t>
             </a:r>
-            <a:endParaRPr b="0" lang="ru-RU" sz="1100" spc="-1" strike="noStrike">
-              <a:latin typeface="Arial"/>
-            </a:endParaRPr>
-          </a:p>
-        </p:txBody>
-      </p:sp>
-      <p:sp>
-        <p:nvSpPr>
-          <p:cNvPr id="61" name="TextBox 13"/>
+            <a:endParaRPr b="0" lang="en-US" sz="1100" spc="-1" strike="noStrike">
+              <a:latin typeface="Arial"/>
+            </a:endParaRPr>
+          </a:p>
+        </p:txBody>
+      </p:sp>
+      <p:sp>
+        <p:nvSpPr>
+          <p:cNvPr id="60" name="TextBox 13"/>
           <p:cNvSpPr/>
           <p:nvPr/>
         </p:nvSpPr>
         <p:spPr>
           <a:xfrm>
             <a:off x="165960" y="200880"/>
-            <a:ext cx="3148200" cy="1842120"/>
+            <a:ext cx="3147840" cy="1841760"/>
           </a:xfrm>
           <a:prstGeom prst="rect">
             <a:avLst/>
@@ -5536,10 +5113,11 @@
                   <a:srgbClr val="ffffff"/>
                 </a:solidFill>
                 <a:latin typeface="Arial"/>
+                <a:ea typeface="DejaVu Sans"/>
               </a:rPr>
               <a:t>TITLE</a:t>
             </a:r>
-            <a:endParaRPr b="0" lang="ru-RU" sz="2200" spc="-1" strike="noStrike">
+            <a:endParaRPr b="0" lang="en-US" sz="2200" spc="-1" strike="noStrike">
               <a:latin typeface="Arial"/>
             </a:endParaRPr>
           </a:p>
@@ -5584,14 +5162,14 @@
       </p:grpSpPr>
       <p:sp>
         <p:nvSpPr>
-          <p:cNvPr id="62" name="Прямоугольник со скругленными углами 3"/>
+          <p:cNvPr id="61" name="Прямоугольник со скругленными углами 3"/>
           <p:cNvSpPr/>
           <p:nvPr/>
         </p:nvSpPr>
         <p:spPr>
           <a:xfrm>
             <a:off x="0" y="0"/>
-            <a:ext cx="9143640" cy="1961640"/>
+            <a:ext cx="9143280" cy="1961280"/>
           </a:xfrm>
           <a:prstGeom prst="roundRect">
             <a:avLst>
@@ -5642,22 +5220,22 @@
               </a:rPr>
               <a:t>PIC</a:t>
             </a:r>
-            <a:endParaRPr b="0" lang="ru-RU" sz="1800" spc="-1" strike="noStrike">
-              <a:latin typeface="Arial"/>
-            </a:endParaRPr>
-          </a:p>
-        </p:txBody>
-      </p:sp>
-      <p:sp>
-        <p:nvSpPr>
-          <p:cNvPr id="63" name="TextBox 10"/>
+            <a:endParaRPr b="0" lang="en-US" sz="1800" spc="-1" strike="noStrike">
+              <a:latin typeface="Arial"/>
+            </a:endParaRPr>
+          </a:p>
+        </p:txBody>
+      </p:sp>
+      <p:sp>
+        <p:nvSpPr>
+          <p:cNvPr id="62" name="TextBox 10"/>
           <p:cNvSpPr/>
           <p:nvPr/>
         </p:nvSpPr>
         <p:spPr>
           <a:xfrm>
             <a:off x="384840" y="2571840"/>
-            <a:ext cx="2665080" cy="713880"/>
+            <a:ext cx="2664720" cy="713520"/>
           </a:xfrm>
           <a:prstGeom prst="rect">
             <a:avLst/>
@@ -5694,22 +5272,22 @@
               </a:rPr>
               <a:t>SUBTITLE1</a:t>
             </a:r>
-            <a:endParaRPr b="0" lang="ru-RU" sz="1400" spc="-1" strike="noStrike">
-              <a:latin typeface="Arial"/>
-            </a:endParaRPr>
-          </a:p>
-        </p:txBody>
-      </p:sp>
-      <p:sp>
-        <p:nvSpPr>
-          <p:cNvPr id="64" name="TextBox 10"/>
+            <a:endParaRPr b="0" lang="en-US" sz="1400" spc="-1" strike="noStrike">
+              <a:latin typeface="Arial"/>
+            </a:endParaRPr>
+          </a:p>
+        </p:txBody>
+      </p:sp>
+      <p:sp>
+        <p:nvSpPr>
+          <p:cNvPr id="63" name="TextBox 10"/>
           <p:cNvSpPr/>
           <p:nvPr/>
         </p:nvSpPr>
         <p:spPr>
           <a:xfrm>
             <a:off x="384840" y="3356280"/>
-            <a:ext cx="2665080" cy="1565280"/>
+            <a:ext cx="2664720" cy="1564920"/>
           </a:xfrm>
           <a:prstGeom prst="rect">
             <a:avLst/>
@@ -5756,22 +5334,22 @@
               </a:rPr>
               <a:t>1</a:t>
             </a:r>
-            <a:endParaRPr b="0" lang="ru-RU" sz="1100" spc="-1" strike="noStrike">
-              <a:latin typeface="Arial"/>
-            </a:endParaRPr>
-          </a:p>
-        </p:txBody>
-      </p:sp>
-      <p:sp>
-        <p:nvSpPr>
-          <p:cNvPr id="65" name="TextBox 10"/>
+            <a:endParaRPr b="0" lang="en-US" sz="1100" spc="-1" strike="noStrike">
+              <a:latin typeface="Arial"/>
+            </a:endParaRPr>
+          </a:p>
+        </p:txBody>
+      </p:sp>
+      <p:sp>
+        <p:nvSpPr>
+          <p:cNvPr id="64" name="TextBox 10"/>
           <p:cNvSpPr/>
           <p:nvPr/>
         </p:nvSpPr>
         <p:spPr>
           <a:xfrm>
             <a:off x="3239280" y="2571840"/>
-            <a:ext cx="2665080" cy="713880"/>
+            <a:ext cx="2664720" cy="713520"/>
           </a:xfrm>
           <a:prstGeom prst="rect">
             <a:avLst/>
@@ -5808,22 +5386,22 @@
               </a:rPr>
               <a:t>SUBTITLE2</a:t>
             </a:r>
-            <a:endParaRPr b="0" lang="ru-RU" sz="1400" spc="-1" strike="noStrike">
-              <a:latin typeface="Arial"/>
-            </a:endParaRPr>
-          </a:p>
-        </p:txBody>
-      </p:sp>
-      <p:sp>
-        <p:nvSpPr>
-          <p:cNvPr id="66" name="TextBox 10"/>
+            <a:endParaRPr b="0" lang="en-US" sz="1400" spc="-1" strike="noStrike">
+              <a:latin typeface="Arial"/>
+            </a:endParaRPr>
+          </a:p>
+        </p:txBody>
+      </p:sp>
+      <p:sp>
+        <p:nvSpPr>
+          <p:cNvPr id="65" name="TextBox 10"/>
           <p:cNvSpPr/>
           <p:nvPr/>
         </p:nvSpPr>
         <p:spPr>
           <a:xfrm>
             <a:off x="3239280" y="3356280"/>
-            <a:ext cx="2665080" cy="1565280"/>
+            <a:ext cx="2664720" cy="1564920"/>
           </a:xfrm>
           <a:prstGeom prst="rect">
             <a:avLst/>
@@ -5870,22 +5448,22 @@
               </a:rPr>
               <a:t>2</a:t>
             </a:r>
-            <a:endParaRPr b="0" lang="ru-RU" sz="1100" spc="-1" strike="noStrike">
-              <a:latin typeface="Arial"/>
-            </a:endParaRPr>
-          </a:p>
-        </p:txBody>
-      </p:sp>
-      <p:sp>
-        <p:nvSpPr>
-          <p:cNvPr id="67" name="TextBox 10"/>
+            <a:endParaRPr b="0" lang="en-US" sz="1100" spc="-1" strike="noStrike">
+              <a:latin typeface="Arial"/>
+            </a:endParaRPr>
+          </a:p>
+        </p:txBody>
+      </p:sp>
+      <p:sp>
+        <p:nvSpPr>
+          <p:cNvPr id="66" name="TextBox 10"/>
           <p:cNvSpPr/>
           <p:nvPr/>
         </p:nvSpPr>
         <p:spPr>
           <a:xfrm>
             <a:off x="6093720" y="2571840"/>
-            <a:ext cx="2665080" cy="713880"/>
+            <a:ext cx="2664720" cy="713520"/>
           </a:xfrm>
           <a:prstGeom prst="rect">
             <a:avLst/>
@@ -5922,22 +5500,22 @@
               </a:rPr>
               <a:t>SUBTITLE3</a:t>
             </a:r>
-            <a:endParaRPr b="0" lang="ru-RU" sz="1400" spc="-1" strike="noStrike">
-              <a:latin typeface="Arial"/>
-            </a:endParaRPr>
-          </a:p>
-        </p:txBody>
-      </p:sp>
-      <p:sp>
-        <p:nvSpPr>
-          <p:cNvPr id="68" name="TextBox 10"/>
+            <a:endParaRPr b="0" lang="en-US" sz="1400" spc="-1" strike="noStrike">
+              <a:latin typeface="Arial"/>
+            </a:endParaRPr>
+          </a:p>
+        </p:txBody>
+      </p:sp>
+      <p:sp>
+        <p:nvSpPr>
+          <p:cNvPr id="67" name="TextBox 10"/>
           <p:cNvSpPr/>
           <p:nvPr/>
         </p:nvSpPr>
         <p:spPr>
           <a:xfrm>
             <a:off x="6093720" y="3356280"/>
-            <a:ext cx="2665080" cy="1565280"/>
+            <a:ext cx="2664720" cy="1564920"/>
           </a:xfrm>
           <a:prstGeom prst="rect">
             <a:avLst/>
@@ -5984,22 +5562,22 @@
               </a:rPr>
               <a:t>3</a:t>
             </a:r>
-            <a:endParaRPr b="0" lang="ru-RU" sz="1100" spc="-1" strike="noStrike">
-              <a:latin typeface="Arial"/>
-            </a:endParaRPr>
-          </a:p>
-        </p:txBody>
-      </p:sp>
-      <p:sp>
-        <p:nvSpPr>
-          <p:cNvPr id="69" name="TextBox 9"/>
+            <a:endParaRPr b="0" lang="en-US" sz="1100" spc="-1" strike="noStrike">
+              <a:latin typeface="Arial"/>
+            </a:endParaRPr>
+          </a:p>
+        </p:txBody>
+      </p:sp>
+      <p:sp>
+        <p:nvSpPr>
+          <p:cNvPr id="68" name="TextBox 9"/>
           <p:cNvSpPr/>
           <p:nvPr/>
         </p:nvSpPr>
         <p:spPr>
           <a:xfrm>
             <a:off x="384840" y="2178000"/>
-            <a:ext cx="8465760" cy="480960"/>
+            <a:ext cx="8465400" cy="480600"/>
           </a:xfrm>
           <a:prstGeom prst="rect">
             <a:avLst/>
@@ -6032,10 +5610,11 @@
                   <a:srgbClr val="ffffff"/>
                 </a:solidFill>
                 <a:latin typeface="Arial"/>
+                <a:ea typeface="DejaVu Sans"/>
               </a:rPr>
               <a:t>TITLE</a:t>
             </a:r>
-            <a:endParaRPr b="0" lang="ru-RU" sz="2200" spc="-1" strike="noStrike">
+            <a:endParaRPr b="0" lang="en-US" sz="2200" spc="-1" strike="noStrike">
               <a:latin typeface="Arial"/>
             </a:endParaRPr>
           </a:p>
@@ -6080,14 +5659,14 @@
       </p:grpSpPr>
       <p:sp>
         <p:nvSpPr>
-          <p:cNvPr id="70" name="Прямоугольник: скругленные углы 15"/>
+          <p:cNvPr id="69" name="Прямоугольник: скругленные углы 15"/>
           <p:cNvSpPr/>
           <p:nvPr/>
         </p:nvSpPr>
         <p:spPr>
           <a:xfrm>
             <a:off x="4636440" y="250200"/>
-            <a:ext cx="4198320" cy="4625280"/>
+            <a:ext cx="4197960" cy="4624920"/>
           </a:xfrm>
           <a:prstGeom prst="roundRect">
             <a:avLst>
@@ -6134,25 +5713,26 @@
                   <a:srgbClr val="ffffff"/>
                 </a:solidFill>
                 <a:latin typeface="Calibri"/>
+                <a:ea typeface="DejaVu Sans"/>
               </a:rPr>
               <a:t>PIC</a:t>
             </a:r>
-            <a:endParaRPr b="0" lang="ru-RU" sz="1800" spc="-1" strike="noStrike">
-              <a:latin typeface="Arial"/>
-            </a:endParaRPr>
-          </a:p>
-        </p:txBody>
-      </p:sp>
-      <p:sp>
-        <p:nvSpPr>
-          <p:cNvPr id="71" name="Прямоугольник: скругленные углы 16"/>
+            <a:endParaRPr b="0" lang="en-US" sz="1800" spc="-1" strike="noStrike">
+              <a:latin typeface="Arial"/>
+            </a:endParaRPr>
+          </a:p>
+        </p:txBody>
+      </p:sp>
+      <p:sp>
+        <p:nvSpPr>
+          <p:cNvPr id="70" name="Прямоугольник: скругленные углы 16"/>
           <p:cNvSpPr/>
           <p:nvPr/>
         </p:nvSpPr>
         <p:spPr>
           <a:xfrm>
             <a:off x="329400" y="257040"/>
-            <a:ext cx="4198320" cy="4625280"/>
+            <a:ext cx="4197960" cy="4624920"/>
           </a:xfrm>
           <a:prstGeom prst="roundRect">
             <a:avLst>
@@ -6186,14 +5766,14 @@
       </p:sp>
       <p:sp>
         <p:nvSpPr>
-          <p:cNvPr id="72" name="Овал 9"/>
+          <p:cNvPr id="71" name="Овал 9"/>
           <p:cNvSpPr/>
           <p:nvPr/>
         </p:nvSpPr>
         <p:spPr>
           <a:xfrm>
             <a:off x="4272120" y="1193040"/>
-            <a:ext cx="635400" cy="635400"/>
+            <a:ext cx="635040" cy="635040"/>
           </a:xfrm>
           <a:prstGeom prst="ellipse">
             <a:avLst/>
@@ -6222,14 +5802,14 @@
       </p:sp>
       <p:sp>
         <p:nvSpPr>
-          <p:cNvPr id="73" name="TextBox 10"/>
+          <p:cNvPr id="72" name="TextBox 10"/>
           <p:cNvSpPr/>
           <p:nvPr/>
         </p:nvSpPr>
         <p:spPr>
           <a:xfrm>
             <a:off x="581760" y="828720"/>
-            <a:ext cx="3693600" cy="550800"/>
+            <a:ext cx="3693240" cy="550440"/>
           </a:xfrm>
           <a:prstGeom prst="rect">
             <a:avLst/>
@@ -6276,22 +5856,22 @@
               </a:rPr>
               <a:t>1</a:t>
             </a:r>
-            <a:endParaRPr b="0" lang="ru-RU" sz="1400" spc="-1" strike="noStrike">
-              <a:latin typeface="Arial"/>
-            </a:endParaRPr>
-          </a:p>
-        </p:txBody>
-      </p:sp>
-      <p:sp>
-        <p:nvSpPr>
-          <p:cNvPr id="74" name="TextBox 10"/>
+            <a:endParaRPr b="0" lang="en-US" sz="1400" spc="-1" strike="noStrike">
+              <a:latin typeface="Arial"/>
+            </a:endParaRPr>
+          </a:p>
+        </p:txBody>
+      </p:sp>
+      <p:sp>
+        <p:nvSpPr>
+          <p:cNvPr id="73" name="TextBox 10"/>
           <p:cNvSpPr/>
           <p:nvPr/>
         </p:nvSpPr>
         <p:spPr>
           <a:xfrm>
             <a:off x="581760" y="1364400"/>
-            <a:ext cx="3693600" cy="789840"/>
+            <a:ext cx="3693240" cy="789480"/>
           </a:xfrm>
           <a:prstGeom prst="rect">
             <a:avLst/>
@@ -6338,22 +5918,22 @@
               </a:rPr>
               <a:t>1</a:t>
             </a:r>
-            <a:endParaRPr b="0" lang="ru-RU" sz="1100" spc="-1" strike="noStrike">
-              <a:latin typeface="Arial"/>
-            </a:endParaRPr>
-          </a:p>
-        </p:txBody>
-      </p:sp>
-      <p:sp>
-        <p:nvSpPr>
-          <p:cNvPr id="75" name="TextBox 10"/>
+            <a:endParaRPr b="0" lang="en-US" sz="1100" spc="-1" strike="noStrike">
+              <a:latin typeface="Arial"/>
+            </a:endParaRPr>
+          </a:p>
+        </p:txBody>
+      </p:sp>
+      <p:sp>
+        <p:nvSpPr>
+          <p:cNvPr id="74" name="TextBox 10"/>
           <p:cNvSpPr/>
           <p:nvPr/>
         </p:nvSpPr>
         <p:spPr>
           <a:xfrm>
             <a:off x="578160" y="2154600"/>
-            <a:ext cx="3693600" cy="550800"/>
+            <a:ext cx="3693240" cy="550440"/>
           </a:xfrm>
           <a:prstGeom prst="rect">
             <a:avLst/>
@@ -6390,22 +5970,22 @@
               </a:rPr>
               <a:t>SUBTITLE2</a:t>
             </a:r>
-            <a:endParaRPr b="0" lang="ru-RU" sz="1400" spc="-1" strike="noStrike">
-              <a:latin typeface="Arial"/>
-            </a:endParaRPr>
-          </a:p>
-        </p:txBody>
-      </p:sp>
-      <p:sp>
-        <p:nvSpPr>
-          <p:cNvPr id="76" name="TextBox 10"/>
+            <a:endParaRPr b="0" lang="en-US" sz="1400" spc="-1" strike="noStrike">
+              <a:latin typeface="Arial"/>
+            </a:endParaRPr>
+          </a:p>
+        </p:txBody>
+      </p:sp>
+      <p:sp>
+        <p:nvSpPr>
+          <p:cNvPr id="75" name="TextBox 10"/>
           <p:cNvSpPr/>
           <p:nvPr/>
         </p:nvSpPr>
         <p:spPr>
           <a:xfrm>
             <a:off x="578160" y="2687040"/>
-            <a:ext cx="3693600" cy="843480"/>
+            <a:ext cx="3693240" cy="843120"/>
           </a:xfrm>
           <a:prstGeom prst="rect">
             <a:avLst/>
@@ -6452,22 +6032,22 @@
               </a:rPr>
               <a:t>2</a:t>
             </a:r>
-            <a:endParaRPr b="0" lang="ru-RU" sz="1100" spc="-1" strike="noStrike">
-              <a:latin typeface="Arial"/>
-            </a:endParaRPr>
-          </a:p>
-        </p:txBody>
-      </p:sp>
-      <p:sp>
-        <p:nvSpPr>
-          <p:cNvPr id="77" name="TextBox 10"/>
+            <a:endParaRPr b="0" lang="en-US" sz="1100" spc="-1" strike="noStrike">
+              <a:latin typeface="Arial"/>
+            </a:endParaRPr>
+          </a:p>
+        </p:txBody>
+      </p:sp>
+      <p:sp>
+        <p:nvSpPr>
+          <p:cNvPr id="76" name="TextBox 10"/>
           <p:cNvSpPr/>
           <p:nvPr/>
         </p:nvSpPr>
         <p:spPr>
           <a:xfrm>
             <a:off x="578160" y="3482280"/>
-            <a:ext cx="3693600" cy="550800"/>
+            <a:ext cx="3693240" cy="550440"/>
           </a:xfrm>
           <a:prstGeom prst="rect">
             <a:avLst/>
@@ -6504,22 +6084,22 @@
               </a:rPr>
               <a:t>SUBTITLE3</a:t>
             </a:r>
-            <a:endParaRPr b="0" lang="ru-RU" sz="1400" spc="-1" strike="noStrike">
-              <a:latin typeface="Arial"/>
-            </a:endParaRPr>
-          </a:p>
-        </p:txBody>
-      </p:sp>
-      <p:sp>
-        <p:nvSpPr>
-          <p:cNvPr id="78" name="TextBox 10"/>
+            <a:endParaRPr b="0" lang="en-US" sz="1400" spc="-1" strike="noStrike">
+              <a:latin typeface="Arial"/>
+            </a:endParaRPr>
+          </a:p>
+        </p:txBody>
+      </p:sp>
+      <p:sp>
+        <p:nvSpPr>
+          <p:cNvPr id="77" name="TextBox 10"/>
           <p:cNvSpPr/>
           <p:nvPr/>
         </p:nvSpPr>
         <p:spPr>
           <a:xfrm>
             <a:off x="578160" y="4015080"/>
-            <a:ext cx="3693600" cy="794880"/>
+            <a:ext cx="3693240" cy="794520"/>
           </a:xfrm>
           <a:prstGeom prst="rect">
             <a:avLst/>
@@ -6566,22 +6146,22 @@
               </a:rPr>
               <a:t>3</a:t>
             </a:r>
-            <a:endParaRPr b="0" lang="ru-RU" sz="1100" spc="-1" strike="noStrike">
-              <a:latin typeface="Arial"/>
-            </a:endParaRPr>
-          </a:p>
-        </p:txBody>
-      </p:sp>
-      <p:sp>
-        <p:nvSpPr>
-          <p:cNvPr id="79" name="TextBox 30"/>
+            <a:endParaRPr b="0" lang="en-US" sz="1100" spc="-1" strike="noStrike">
+              <a:latin typeface="Arial"/>
+            </a:endParaRPr>
+          </a:p>
+        </p:txBody>
+      </p:sp>
+      <p:sp>
+        <p:nvSpPr>
+          <p:cNvPr id="78" name="TextBox 30"/>
           <p:cNvSpPr/>
           <p:nvPr/>
         </p:nvSpPr>
         <p:spPr>
           <a:xfrm>
             <a:off x="553680" y="352440"/>
-            <a:ext cx="3803760" cy="789840"/>
+            <a:ext cx="3803400" cy="789480"/>
           </a:xfrm>
           <a:prstGeom prst="rect">
             <a:avLst/>
@@ -6614,10 +6194,11 @@
                   <a:srgbClr val="ffffff"/>
                 </a:solidFill>
                 <a:latin typeface="Arial"/>
+                <a:ea typeface="DejaVu Sans"/>
               </a:rPr>
               <a:t>TITLE</a:t>
             </a:r>
-            <a:endParaRPr b="0" lang="ru-RU" sz="2200" spc="-1" strike="noStrike">
+            <a:endParaRPr b="0" lang="en-US" sz="2200" spc="-1" strike="noStrike">
               <a:latin typeface="Arial"/>
             </a:endParaRPr>
           </a:p>
@@ -6662,14 +6243,14 @@
       </p:grpSpPr>
       <p:sp>
         <p:nvSpPr>
-          <p:cNvPr id="80" name="TextBox 20"/>
+          <p:cNvPr id="79" name="TextBox 20"/>
           <p:cNvSpPr/>
           <p:nvPr/>
         </p:nvSpPr>
         <p:spPr>
           <a:xfrm>
             <a:off x="516960" y="411840"/>
-            <a:ext cx="8465760" cy="480960"/>
+            <a:ext cx="8465400" cy="480600"/>
           </a:xfrm>
           <a:prstGeom prst="rect">
             <a:avLst/>
@@ -6702,25 +6283,26 @@
                   <a:srgbClr val="ffffff"/>
                 </a:solidFill>
                 <a:latin typeface="Arial"/>
+                <a:ea typeface="DejaVu Sans"/>
               </a:rPr>
               <a:t>TITLE</a:t>
             </a:r>
-            <a:endParaRPr b="0" lang="ru-RU" sz="2200" spc="-1" strike="noStrike">
-              <a:latin typeface="Arial"/>
-            </a:endParaRPr>
-          </a:p>
-        </p:txBody>
-      </p:sp>
-      <p:sp>
-        <p:nvSpPr>
-          <p:cNvPr id="81" name="Прямоугольник со скругленными углами 3"/>
+            <a:endParaRPr b="0" lang="en-US" sz="2200" spc="-1" strike="noStrike">
+              <a:latin typeface="Arial"/>
+            </a:endParaRPr>
+          </a:p>
+        </p:txBody>
+      </p:sp>
+      <p:sp>
+        <p:nvSpPr>
+          <p:cNvPr id="80" name="Прямоугольник со скругленными углами 3"/>
           <p:cNvSpPr/>
           <p:nvPr/>
         </p:nvSpPr>
         <p:spPr>
           <a:xfrm>
             <a:off x="456480" y="1406160"/>
-            <a:ext cx="2300760" cy="1440000"/>
+            <a:ext cx="2300400" cy="1439640"/>
           </a:xfrm>
           <a:prstGeom prst="roundRect">
             <a:avLst>
@@ -6771,22 +6353,22 @@
               </a:rPr>
               <a:t>PIC</a:t>
             </a:r>
-            <a:endParaRPr b="0" lang="ru-RU" sz="1800" spc="-1" strike="noStrike">
-              <a:latin typeface="Arial"/>
-            </a:endParaRPr>
-          </a:p>
-        </p:txBody>
-      </p:sp>
-      <p:sp>
-        <p:nvSpPr>
-          <p:cNvPr id="82" name="TextBox 10"/>
+            <a:endParaRPr b="0" lang="en-US" sz="1800" spc="-1" strike="noStrike">
+              <a:latin typeface="Arial"/>
+            </a:endParaRPr>
+          </a:p>
+        </p:txBody>
+      </p:sp>
+      <p:sp>
+        <p:nvSpPr>
+          <p:cNvPr id="81" name="TextBox 10"/>
           <p:cNvSpPr/>
           <p:nvPr/>
         </p:nvSpPr>
         <p:spPr>
           <a:xfrm>
             <a:off x="384840" y="3013560"/>
-            <a:ext cx="2429280" cy="713880"/>
+            <a:ext cx="2428920" cy="713520"/>
           </a:xfrm>
           <a:prstGeom prst="rect">
             <a:avLst/>
@@ -6823,22 +6405,22 @@
               </a:rPr>
               <a:t>SUBTITLE1</a:t>
             </a:r>
-            <a:endParaRPr b="0" lang="ru-RU" sz="1400" spc="-1" strike="noStrike">
-              <a:latin typeface="Arial"/>
-            </a:endParaRPr>
-          </a:p>
-        </p:txBody>
-      </p:sp>
-      <p:sp>
-        <p:nvSpPr>
-          <p:cNvPr id="83" name="TextBox 10"/>
+            <a:endParaRPr b="0" lang="en-US" sz="1400" spc="-1" strike="noStrike">
+              <a:latin typeface="Arial"/>
+            </a:endParaRPr>
+          </a:p>
+        </p:txBody>
+      </p:sp>
+      <p:sp>
+        <p:nvSpPr>
+          <p:cNvPr id="82" name="TextBox 10"/>
           <p:cNvSpPr/>
           <p:nvPr/>
         </p:nvSpPr>
         <p:spPr>
           <a:xfrm>
             <a:off x="384840" y="3798000"/>
-            <a:ext cx="2429280" cy="1037880"/>
+            <a:ext cx="2428920" cy="1037520"/>
           </a:xfrm>
           <a:prstGeom prst="rect">
             <a:avLst/>
@@ -6885,22 +6467,22 @@
               </a:rPr>
               <a:t>1</a:t>
             </a:r>
-            <a:endParaRPr b="0" lang="ru-RU" sz="1100" spc="-1" strike="noStrike">
-              <a:latin typeface="Arial"/>
-            </a:endParaRPr>
-          </a:p>
-        </p:txBody>
-      </p:sp>
-      <p:sp>
-        <p:nvSpPr>
-          <p:cNvPr id="84" name="Прямоугольник: скругленные углы 1"/>
+            <a:endParaRPr b="0" lang="en-US" sz="1100" spc="-1" strike="noStrike">
+              <a:latin typeface="Arial"/>
+            </a:endParaRPr>
+          </a:p>
+        </p:txBody>
+      </p:sp>
+      <p:sp>
+        <p:nvSpPr>
+          <p:cNvPr id="83" name="Прямоугольник: скругленные углы 1"/>
           <p:cNvSpPr/>
           <p:nvPr/>
         </p:nvSpPr>
         <p:spPr>
           <a:xfrm>
             <a:off x="328680" y="228600"/>
-            <a:ext cx="8501400" cy="813960"/>
+            <a:ext cx="8501040" cy="813600"/>
           </a:xfrm>
           <a:prstGeom prst="roundRect">
             <a:avLst>
@@ -6931,14 +6513,14 @@
       </p:sp>
       <p:sp>
         <p:nvSpPr>
-          <p:cNvPr id="85" name="Прямоугольник: скругленные углы 10"/>
+          <p:cNvPr id="84" name="Прямоугольник: скругленные углы 10"/>
           <p:cNvSpPr/>
           <p:nvPr/>
         </p:nvSpPr>
         <p:spPr>
           <a:xfrm>
             <a:off x="328680" y="1279080"/>
-            <a:ext cx="2557080" cy="3642840"/>
+            <a:ext cx="2556720" cy="3642480"/>
           </a:xfrm>
           <a:prstGeom prst="roundRect">
             <a:avLst>
@@ -6969,14 +6551,14 @@
       </p:sp>
       <p:sp>
         <p:nvSpPr>
-          <p:cNvPr id="86" name="Прямоугольник со скругленными углами 3"/>
+          <p:cNvPr id="85" name="Прямоугольник со скругленными углами 3"/>
           <p:cNvSpPr/>
           <p:nvPr/>
         </p:nvSpPr>
         <p:spPr>
           <a:xfrm>
             <a:off x="3421080" y="1398960"/>
-            <a:ext cx="2300760" cy="1440000"/>
+            <a:ext cx="2300400" cy="1439640"/>
           </a:xfrm>
           <a:prstGeom prst="roundRect">
             <a:avLst>
@@ -7027,22 +6609,22 @@
               </a:rPr>
               <a:t>PIC</a:t>
             </a:r>
-            <a:endParaRPr b="0" lang="ru-RU" sz="1800" spc="-1" strike="noStrike">
-              <a:latin typeface="Arial"/>
-            </a:endParaRPr>
-          </a:p>
-        </p:txBody>
-      </p:sp>
-      <p:sp>
-        <p:nvSpPr>
-          <p:cNvPr id="87" name="TextBox 10"/>
+            <a:endParaRPr b="0" lang="en-US" sz="1800" spc="-1" strike="noStrike">
+              <a:latin typeface="Arial"/>
+            </a:endParaRPr>
+          </a:p>
+        </p:txBody>
+      </p:sp>
+      <p:sp>
+        <p:nvSpPr>
+          <p:cNvPr id="86" name="TextBox 10"/>
           <p:cNvSpPr/>
           <p:nvPr/>
         </p:nvSpPr>
         <p:spPr>
           <a:xfrm>
             <a:off x="3349440" y="3013560"/>
-            <a:ext cx="2429280" cy="713880"/>
+            <a:ext cx="2428920" cy="713520"/>
           </a:xfrm>
           <a:prstGeom prst="rect">
             <a:avLst/>
@@ -7089,22 +6671,22 @@
               </a:rPr>
               <a:t>2</a:t>
             </a:r>
-            <a:endParaRPr b="0" lang="ru-RU" sz="1400" spc="-1" strike="noStrike">
-              <a:latin typeface="Arial"/>
-            </a:endParaRPr>
-          </a:p>
-        </p:txBody>
-      </p:sp>
-      <p:sp>
-        <p:nvSpPr>
-          <p:cNvPr id="88" name="TextBox 10"/>
+            <a:endParaRPr b="0" lang="en-US" sz="1400" spc="-1" strike="noStrike">
+              <a:latin typeface="Arial"/>
+            </a:endParaRPr>
+          </a:p>
+        </p:txBody>
+      </p:sp>
+      <p:sp>
+        <p:nvSpPr>
+          <p:cNvPr id="87" name="TextBox 10"/>
           <p:cNvSpPr/>
           <p:nvPr/>
         </p:nvSpPr>
         <p:spPr>
           <a:xfrm>
             <a:off x="3349440" y="3798000"/>
-            <a:ext cx="2429280" cy="1037880"/>
+            <a:ext cx="2428920" cy="1037520"/>
           </a:xfrm>
           <a:prstGeom prst="rect">
             <a:avLst/>
@@ -7151,22 +6733,22 @@
               </a:rPr>
               <a:t>2</a:t>
             </a:r>
-            <a:endParaRPr b="0" lang="ru-RU" sz="1100" spc="-1" strike="noStrike">
-              <a:latin typeface="Arial"/>
-            </a:endParaRPr>
-          </a:p>
-        </p:txBody>
-      </p:sp>
-      <p:sp>
-        <p:nvSpPr>
-          <p:cNvPr id="89" name="Прямоугольник: скругленные углы 14"/>
+            <a:endParaRPr b="0" lang="en-US" sz="1100" spc="-1" strike="noStrike">
+              <a:latin typeface="Arial"/>
+            </a:endParaRPr>
+          </a:p>
+        </p:txBody>
+      </p:sp>
+      <p:sp>
+        <p:nvSpPr>
+          <p:cNvPr id="88" name="Прямоугольник: скругленные углы 14"/>
           <p:cNvSpPr/>
           <p:nvPr/>
         </p:nvSpPr>
         <p:spPr>
           <a:xfrm>
             <a:off x="3293280" y="1271880"/>
-            <a:ext cx="2557080" cy="3642840"/>
+            <a:ext cx="2556720" cy="3642480"/>
           </a:xfrm>
           <a:prstGeom prst="roundRect">
             <a:avLst>
@@ -7197,14 +6779,14 @@
       </p:sp>
       <p:sp>
         <p:nvSpPr>
-          <p:cNvPr id="90" name="Прямоугольник со скругленными углами 3"/>
+          <p:cNvPr id="89" name="Прямоугольник со скругленными углами 3"/>
           <p:cNvSpPr/>
           <p:nvPr/>
         </p:nvSpPr>
         <p:spPr>
           <a:xfrm>
             <a:off x="6400800" y="1379520"/>
-            <a:ext cx="2300760" cy="1440000"/>
+            <a:ext cx="2300400" cy="1439640"/>
           </a:xfrm>
           <a:prstGeom prst="roundRect">
             <a:avLst>
@@ -7255,22 +6837,22 @@
               </a:rPr>
               <a:t>PIC</a:t>
             </a:r>
-            <a:endParaRPr b="0" lang="ru-RU" sz="1800" spc="-1" strike="noStrike">
-              <a:latin typeface="Arial"/>
-            </a:endParaRPr>
-          </a:p>
-        </p:txBody>
-      </p:sp>
-      <p:sp>
-        <p:nvSpPr>
-          <p:cNvPr id="91" name="TextBox 10"/>
+            <a:endParaRPr b="0" lang="en-US" sz="1800" spc="-1" strike="noStrike">
+              <a:latin typeface="Arial"/>
+            </a:endParaRPr>
+          </a:p>
+        </p:txBody>
+      </p:sp>
+      <p:sp>
+        <p:nvSpPr>
+          <p:cNvPr id="90" name="TextBox 10"/>
           <p:cNvSpPr/>
           <p:nvPr/>
         </p:nvSpPr>
         <p:spPr>
           <a:xfrm>
             <a:off x="6329520" y="3013560"/>
-            <a:ext cx="2429280" cy="713880"/>
+            <a:ext cx="2428920" cy="713520"/>
           </a:xfrm>
           <a:prstGeom prst="rect">
             <a:avLst/>
@@ -7317,22 +6899,22 @@
               </a:rPr>
               <a:t>3</a:t>
             </a:r>
-            <a:endParaRPr b="0" lang="ru-RU" sz="1400" spc="-1" strike="noStrike">
-              <a:latin typeface="Arial"/>
-            </a:endParaRPr>
-          </a:p>
-        </p:txBody>
-      </p:sp>
-      <p:sp>
-        <p:nvSpPr>
-          <p:cNvPr id="92" name="TextBox 10"/>
+            <a:endParaRPr b="0" lang="en-US" sz="1400" spc="-1" strike="noStrike">
+              <a:latin typeface="Arial"/>
+            </a:endParaRPr>
+          </a:p>
+        </p:txBody>
+      </p:sp>
+      <p:sp>
+        <p:nvSpPr>
+          <p:cNvPr id="91" name="TextBox 10"/>
           <p:cNvSpPr/>
           <p:nvPr/>
         </p:nvSpPr>
         <p:spPr>
           <a:xfrm>
             <a:off x="6329520" y="3798000"/>
-            <a:ext cx="2429280" cy="1037880"/>
+            <a:ext cx="2428920" cy="1037520"/>
           </a:xfrm>
           <a:prstGeom prst="rect">
             <a:avLst/>
@@ -7379,22 +6961,22 @@
               </a:rPr>
               <a:t>3</a:t>
             </a:r>
-            <a:endParaRPr b="0" lang="ru-RU" sz="1100" spc="-1" strike="noStrike">
-              <a:latin typeface="Arial"/>
-            </a:endParaRPr>
-          </a:p>
-        </p:txBody>
-      </p:sp>
-      <p:sp>
-        <p:nvSpPr>
-          <p:cNvPr id="93" name="Прямоугольник: скругленные углы 19"/>
+            <a:endParaRPr b="0" lang="en-US" sz="1100" spc="-1" strike="noStrike">
+              <a:latin typeface="Arial"/>
+            </a:endParaRPr>
+          </a:p>
+        </p:txBody>
+      </p:sp>
+      <p:sp>
+        <p:nvSpPr>
+          <p:cNvPr id="92" name="Прямоугольник: скругленные углы 19"/>
           <p:cNvSpPr/>
           <p:nvPr/>
         </p:nvSpPr>
         <p:spPr>
           <a:xfrm>
             <a:off x="6273000" y="1252800"/>
-            <a:ext cx="2557080" cy="3642840"/>
+            <a:ext cx="2556720" cy="3642480"/>
           </a:xfrm>
           <a:prstGeom prst="roundRect">
             <a:avLst>
@@ -7462,14 +7044,14 @@
       </p:grpSpPr>
       <p:sp>
         <p:nvSpPr>
-          <p:cNvPr id="94" name="Прямоугольник со скругленными углами 3"/>
+          <p:cNvPr id="93" name="Прямоугольник со скругленными углами 3"/>
           <p:cNvSpPr/>
           <p:nvPr/>
         </p:nvSpPr>
         <p:spPr>
           <a:xfrm>
             <a:off x="0" y="0"/>
-            <a:ext cx="3396960" cy="5143320"/>
+            <a:ext cx="3396600" cy="5142960"/>
           </a:xfrm>
           <a:prstGeom prst="roundRect">
             <a:avLst>
@@ -7520,22 +7102,22 @@
               </a:rPr>
               <a:t>PIC</a:t>
             </a:r>
-            <a:endParaRPr b="0" lang="ru-RU" sz="1800" spc="-1" strike="noStrike">
-              <a:latin typeface="Arial"/>
-            </a:endParaRPr>
-          </a:p>
-        </p:txBody>
-      </p:sp>
-      <p:sp>
-        <p:nvSpPr>
-          <p:cNvPr id="95" name="TextBox 10"/>
+            <a:endParaRPr b="0" lang="en-US" sz="1800" spc="-1" strike="noStrike">
+              <a:latin typeface="Arial"/>
+            </a:endParaRPr>
+          </a:p>
+        </p:txBody>
+      </p:sp>
+      <p:sp>
+        <p:nvSpPr>
+          <p:cNvPr id="94" name="TextBox 10"/>
           <p:cNvSpPr/>
           <p:nvPr/>
         </p:nvSpPr>
         <p:spPr>
           <a:xfrm>
             <a:off x="4192560" y="3830040"/>
-            <a:ext cx="4672440" cy="329040"/>
+            <a:ext cx="4672080" cy="328680"/>
           </a:xfrm>
           <a:prstGeom prst="rect">
             <a:avLst/>
@@ -7572,22 +7154,22 @@
               </a:rPr>
               <a:t>SUBTITLE3</a:t>
             </a:r>
-            <a:endParaRPr b="0" lang="ru-RU" sz="1400" spc="-1" strike="noStrike">
-              <a:latin typeface="Arial"/>
-            </a:endParaRPr>
-          </a:p>
-        </p:txBody>
-      </p:sp>
-      <p:sp>
-        <p:nvSpPr>
-          <p:cNvPr id="96" name="TextBox 10"/>
+            <a:endParaRPr b="0" lang="en-US" sz="1400" spc="-1" strike="noStrike">
+              <a:latin typeface="Arial"/>
+            </a:endParaRPr>
+          </a:p>
+        </p:txBody>
+      </p:sp>
+      <p:sp>
+        <p:nvSpPr>
+          <p:cNvPr id="95" name="TextBox 10"/>
           <p:cNvSpPr/>
           <p:nvPr/>
         </p:nvSpPr>
         <p:spPr>
           <a:xfrm>
             <a:off x="4192560" y="4188600"/>
-            <a:ext cx="4672440" cy="713880"/>
+            <a:ext cx="4672080" cy="713520"/>
           </a:xfrm>
           <a:prstGeom prst="rect">
             <a:avLst/>
@@ -7634,22 +7216,22 @@
               </a:rPr>
               <a:t>3</a:t>
             </a:r>
-            <a:endParaRPr b="0" lang="ru-RU" sz="1100" spc="-1" strike="noStrike">
-              <a:latin typeface="Arial"/>
-            </a:endParaRPr>
-          </a:p>
-        </p:txBody>
-      </p:sp>
-      <p:sp>
-        <p:nvSpPr>
-          <p:cNvPr id="97" name="Овал 9"/>
+            <a:endParaRPr b="0" lang="en-US" sz="1100" spc="-1" strike="noStrike">
+              <a:latin typeface="Arial"/>
+            </a:endParaRPr>
+          </a:p>
+        </p:txBody>
+      </p:sp>
+      <p:sp>
+        <p:nvSpPr>
+          <p:cNvPr id="96" name="Овал 9"/>
           <p:cNvSpPr/>
           <p:nvPr/>
         </p:nvSpPr>
         <p:spPr>
           <a:xfrm>
             <a:off x="3724560" y="3830040"/>
-            <a:ext cx="403200" cy="403200"/>
+            <a:ext cx="402840" cy="402840"/>
           </a:xfrm>
           <a:prstGeom prst="ellipse">
             <a:avLst/>
@@ -7692,25 +7274,26 @@
                   <a:srgbClr val="ffffff"/>
                 </a:solidFill>
                 <a:latin typeface="Calibri"/>
+                <a:ea typeface="DejaVu Sans"/>
               </a:rPr>
               <a:t>03</a:t>
             </a:r>
-            <a:endParaRPr b="0" lang="ru-RU" sz="800" spc="-1" strike="noStrike">
-              <a:latin typeface="Arial"/>
-            </a:endParaRPr>
-          </a:p>
-        </p:txBody>
-      </p:sp>
-      <p:sp>
-        <p:nvSpPr>
-          <p:cNvPr id="98" name="TextBox 10"/>
+            <a:endParaRPr b="0" lang="en-US" sz="800" spc="-1" strike="noStrike">
+              <a:latin typeface="Arial"/>
+            </a:endParaRPr>
+          </a:p>
+        </p:txBody>
+      </p:sp>
+      <p:sp>
+        <p:nvSpPr>
+          <p:cNvPr id="97" name="TextBox 10"/>
           <p:cNvSpPr/>
           <p:nvPr/>
         </p:nvSpPr>
         <p:spPr>
           <a:xfrm>
             <a:off x="4192560" y="2571840"/>
-            <a:ext cx="4672440" cy="329040"/>
+            <a:ext cx="4672080" cy="328680"/>
           </a:xfrm>
           <a:prstGeom prst="rect">
             <a:avLst/>
@@ -7757,22 +7340,22 @@
               </a:rPr>
               <a:t>2</a:t>
             </a:r>
-            <a:endParaRPr b="0" lang="ru-RU" sz="1400" spc="-1" strike="noStrike">
-              <a:latin typeface="Arial"/>
-            </a:endParaRPr>
-          </a:p>
-        </p:txBody>
-      </p:sp>
-      <p:sp>
-        <p:nvSpPr>
-          <p:cNvPr id="99" name="TextBox 10"/>
+            <a:endParaRPr b="0" lang="en-US" sz="1400" spc="-1" strike="noStrike">
+              <a:latin typeface="Arial"/>
+            </a:endParaRPr>
+          </a:p>
+        </p:txBody>
+      </p:sp>
+      <p:sp>
+        <p:nvSpPr>
+          <p:cNvPr id="98" name="TextBox 10"/>
           <p:cNvSpPr/>
           <p:nvPr/>
         </p:nvSpPr>
         <p:spPr>
           <a:xfrm>
             <a:off x="4192560" y="2930400"/>
-            <a:ext cx="4672440" cy="713880"/>
+            <a:ext cx="4672080" cy="713520"/>
           </a:xfrm>
           <a:prstGeom prst="rect">
             <a:avLst/>
@@ -7819,22 +7402,22 @@
               </a:rPr>
               <a:t>2</a:t>
             </a:r>
-            <a:endParaRPr b="0" lang="ru-RU" sz="1100" spc="-1" strike="noStrike">
-              <a:latin typeface="Arial"/>
-            </a:endParaRPr>
-          </a:p>
-        </p:txBody>
-      </p:sp>
-      <p:sp>
-        <p:nvSpPr>
-          <p:cNvPr id="100" name="Овал 13"/>
+            <a:endParaRPr b="0" lang="en-US" sz="1100" spc="-1" strike="noStrike">
+              <a:latin typeface="Arial"/>
+            </a:endParaRPr>
+          </a:p>
+        </p:txBody>
+      </p:sp>
+      <p:sp>
+        <p:nvSpPr>
+          <p:cNvPr id="99" name="Овал 13"/>
           <p:cNvSpPr/>
           <p:nvPr/>
         </p:nvSpPr>
         <p:spPr>
           <a:xfrm>
             <a:off x="3724560" y="2571840"/>
-            <a:ext cx="403200" cy="403200"/>
+            <a:ext cx="402840" cy="402840"/>
           </a:xfrm>
           <a:prstGeom prst="ellipse">
             <a:avLst/>
@@ -7877,25 +7460,26 @@
                   <a:srgbClr val="ffffff"/>
                 </a:solidFill>
                 <a:latin typeface="Calibri"/>
+                <a:ea typeface="DejaVu Sans"/>
               </a:rPr>
               <a:t>02</a:t>
             </a:r>
-            <a:endParaRPr b="0" lang="ru-RU" sz="800" spc="-1" strike="noStrike">
-              <a:latin typeface="Arial"/>
-            </a:endParaRPr>
-          </a:p>
-        </p:txBody>
-      </p:sp>
-      <p:sp>
-        <p:nvSpPr>
-          <p:cNvPr id="101" name="TextBox 10"/>
+            <a:endParaRPr b="0" lang="en-US" sz="800" spc="-1" strike="noStrike">
+              <a:latin typeface="Arial"/>
+            </a:endParaRPr>
+          </a:p>
+        </p:txBody>
+      </p:sp>
+      <p:sp>
+        <p:nvSpPr>
+          <p:cNvPr id="100" name="TextBox 10"/>
           <p:cNvSpPr/>
           <p:nvPr/>
         </p:nvSpPr>
         <p:spPr>
           <a:xfrm>
             <a:off x="4192560" y="1311840"/>
-            <a:ext cx="4672440" cy="329040"/>
+            <a:ext cx="4672080" cy="328680"/>
           </a:xfrm>
           <a:prstGeom prst="rect">
             <a:avLst/>
@@ -7942,22 +7526,22 @@
               </a:rPr>
               <a:t>1</a:t>
             </a:r>
-            <a:endParaRPr b="0" lang="ru-RU" sz="1400" spc="-1" strike="noStrike">
-              <a:latin typeface="Arial"/>
-            </a:endParaRPr>
-          </a:p>
-        </p:txBody>
-      </p:sp>
-      <p:sp>
-        <p:nvSpPr>
-          <p:cNvPr id="102" name="TextBox 10"/>
+            <a:endParaRPr b="0" lang="en-US" sz="1400" spc="-1" strike="noStrike">
+              <a:latin typeface="Arial"/>
+            </a:endParaRPr>
+          </a:p>
+        </p:txBody>
+      </p:sp>
+      <p:sp>
+        <p:nvSpPr>
+          <p:cNvPr id="101" name="TextBox 10"/>
           <p:cNvSpPr/>
           <p:nvPr/>
         </p:nvSpPr>
         <p:spPr>
           <a:xfrm>
             <a:off x="4192560" y="1670760"/>
-            <a:ext cx="4672440" cy="713880"/>
+            <a:ext cx="4672080" cy="713520"/>
           </a:xfrm>
           <a:prstGeom prst="rect">
             <a:avLst/>
@@ -8004,22 +7588,22 @@
               </a:rPr>
               <a:t>1</a:t>
             </a:r>
-            <a:endParaRPr b="0" lang="ru-RU" sz="1100" spc="-1" strike="noStrike">
-              <a:latin typeface="Arial"/>
-            </a:endParaRPr>
-          </a:p>
-        </p:txBody>
-      </p:sp>
-      <p:sp>
-        <p:nvSpPr>
-          <p:cNvPr id="103" name="Овал 16"/>
+            <a:endParaRPr b="0" lang="en-US" sz="1100" spc="-1" strike="noStrike">
+              <a:latin typeface="Arial"/>
+            </a:endParaRPr>
+          </a:p>
+        </p:txBody>
+      </p:sp>
+      <p:sp>
+        <p:nvSpPr>
+          <p:cNvPr id="102" name="Овал 16"/>
           <p:cNvSpPr/>
           <p:nvPr/>
         </p:nvSpPr>
         <p:spPr>
           <a:xfrm>
             <a:off x="3724560" y="1311840"/>
-            <a:ext cx="403200" cy="403200"/>
+            <a:ext cx="402840" cy="402840"/>
           </a:xfrm>
           <a:prstGeom prst="ellipse">
             <a:avLst/>
@@ -8062,25 +7646,26 @@
                   <a:srgbClr val="ffffff"/>
                 </a:solidFill>
                 <a:latin typeface="Calibri"/>
+                <a:ea typeface="DejaVu Sans"/>
               </a:rPr>
               <a:t>01</a:t>
             </a:r>
-            <a:endParaRPr b="0" lang="ru-RU" sz="800" spc="-1" strike="noStrike">
-              <a:latin typeface="Arial"/>
-            </a:endParaRPr>
-          </a:p>
-        </p:txBody>
-      </p:sp>
-      <p:sp>
-        <p:nvSpPr>
-          <p:cNvPr id="104" name="TextBox 17"/>
+            <a:endParaRPr b="0" lang="en-US" sz="800" spc="-1" strike="noStrike">
+              <a:latin typeface="Arial"/>
+            </a:endParaRPr>
+          </a:p>
+        </p:txBody>
+      </p:sp>
+      <p:sp>
+        <p:nvSpPr>
+          <p:cNvPr id="103" name="TextBox 17"/>
           <p:cNvSpPr/>
           <p:nvPr/>
         </p:nvSpPr>
         <p:spPr>
           <a:xfrm>
             <a:off x="3607560" y="215280"/>
-            <a:ext cx="5375160" cy="909720"/>
+            <a:ext cx="5374800" cy="909360"/>
           </a:xfrm>
           <a:prstGeom prst="rect">
             <a:avLst/>
@@ -8113,10 +7698,11 @@
                   <a:srgbClr val="ffffff"/>
                 </a:solidFill>
                 <a:latin typeface="Arial"/>
+                <a:ea typeface="DejaVu Sans"/>
               </a:rPr>
               <a:t>TITLE</a:t>
             </a:r>
-            <a:endParaRPr b="0" lang="ru-RU" sz="2200" spc="-1" strike="noStrike">
+            <a:endParaRPr b="0" lang="en-US" sz="2200" spc="-1" strike="noStrike">
               <a:latin typeface="Arial"/>
             </a:endParaRPr>
           </a:p>
@@ -8161,14 +7747,14 @@
       </p:grpSpPr>
       <p:sp>
         <p:nvSpPr>
-          <p:cNvPr id="105" name="Прямоугольник: скругленные углы 22"/>
+          <p:cNvPr id="104" name="Прямоугольник: скругленные углы 22"/>
           <p:cNvSpPr/>
           <p:nvPr/>
         </p:nvSpPr>
         <p:spPr>
           <a:xfrm>
             <a:off x="3417120" y="1051560"/>
-            <a:ext cx="5047920" cy="841680"/>
+            <a:ext cx="5047560" cy="841320"/>
           </a:xfrm>
           <a:prstGeom prst="roundRect">
             <a:avLst>
@@ -8199,14 +7785,14 @@
       </p:sp>
       <p:sp>
         <p:nvSpPr>
-          <p:cNvPr id="106" name="Прямоугольник: скругленные углы 28"/>
+          <p:cNvPr id="105" name="Прямоугольник: скругленные углы 28"/>
           <p:cNvSpPr/>
           <p:nvPr/>
         </p:nvSpPr>
         <p:spPr>
           <a:xfrm>
             <a:off x="3417120" y="2451960"/>
-            <a:ext cx="5047920" cy="841680"/>
+            <a:ext cx="5047560" cy="841320"/>
           </a:xfrm>
           <a:prstGeom prst="roundRect">
             <a:avLst>
@@ -8237,14 +7823,14 @@
       </p:sp>
       <p:sp>
         <p:nvSpPr>
-          <p:cNvPr id="107" name="Прямоугольник: скругленные углы 32"/>
+          <p:cNvPr id="106" name="Прямоугольник: скругленные углы 32"/>
           <p:cNvSpPr/>
           <p:nvPr/>
         </p:nvSpPr>
         <p:spPr>
           <a:xfrm>
             <a:off x="3417120" y="3849840"/>
-            <a:ext cx="5047920" cy="841680"/>
+            <a:ext cx="5047560" cy="841320"/>
           </a:xfrm>
           <a:prstGeom prst="roundRect">
             <a:avLst>
@@ -8275,14 +7861,14 @@
       </p:sp>
       <p:sp>
         <p:nvSpPr>
-          <p:cNvPr id="108" name="TextBox 10"/>
+          <p:cNvPr id="107" name="TextBox 10"/>
           <p:cNvSpPr/>
           <p:nvPr/>
         </p:nvSpPr>
         <p:spPr>
           <a:xfrm>
             <a:off x="3821760" y="1115280"/>
-            <a:ext cx="4483800" cy="713880"/>
+            <a:ext cx="4483440" cy="713520"/>
           </a:xfrm>
           <a:prstGeom prst="rect">
             <a:avLst/>
@@ -8329,15 +7915,15 @@
               </a:rPr>
               <a:t>1</a:t>
             </a:r>
-            <a:endParaRPr b="0" lang="ru-RU" sz="1100" spc="-1" strike="noStrike">
-              <a:latin typeface="Arial"/>
-            </a:endParaRPr>
-          </a:p>
-        </p:txBody>
-      </p:sp>
-      <p:sp>
-        <p:nvSpPr>
-          <p:cNvPr id="109" name="Прямая соединительная линия 4"/>
+            <a:endParaRPr b="0" lang="en-US" sz="1100" spc="-1" strike="noStrike">
+              <a:latin typeface="Arial"/>
+            </a:endParaRPr>
+          </a:p>
+        </p:txBody>
+      </p:sp>
+      <p:sp>
+        <p:nvSpPr>
+          <p:cNvPr id="108" name="Прямая соединительная линия 4"/>
           <p:cNvSpPr/>
           <p:nvPr/>
         </p:nvSpPr>
@@ -8370,14 +7956,14 @@
       </p:sp>
       <p:sp>
         <p:nvSpPr>
-          <p:cNvPr id="110" name="Прямоугольник: скругленные углы 19"/>
+          <p:cNvPr id="109" name="Прямоугольник: скругленные углы 19"/>
           <p:cNvSpPr/>
           <p:nvPr/>
         </p:nvSpPr>
         <p:spPr>
           <a:xfrm>
             <a:off x="1135800" y="1033200"/>
-            <a:ext cx="2642760" cy="880920"/>
+            <a:ext cx="2642400" cy="880560"/>
           </a:xfrm>
           <a:prstGeom prst="roundRect">
             <a:avLst>
@@ -8408,14 +7994,14 @@
       </p:sp>
       <p:sp>
         <p:nvSpPr>
-          <p:cNvPr id="111" name="TextBox 10"/>
+          <p:cNvPr id="110" name="TextBox 10"/>
           <p:cNvSpPr/>
           <p:nvPr/>
         </p:nvSpPr>
         <p:spPr>
           <a:xfrm>
             <a:off x="1164600" y="1033200"/>
-            <a:ext cx="2546280" cy="880920"/>
+            <a:ext cx="2545920" cy="880560"/>
           </a:xfrm>
           <a:prstGeom prst="rect">
             <a:avLst/>
@@ -8462,22 +8048,22 @@
               </a:rPr>
               <a:t>1</a:t>
             </a:r>
-            <a:endParaRPr b="0" lang="ru-RU" sz="1400" spc="-1" strike="noStrike">
-              <a:latin typeface="Arial"/>
-            </a:endParaRPr>
-          </a:p>
-        </p:txBody>
-      </p:sp>
-      <p:sp>
-        <p:nvSpPr>
-          <p:cNvPr id="112" name="TextBox 10"/>
+            <a:endParaRPr b="0" lang="en-US" sz="1400" spc="-1" strike="noStrike">
+              <a:latin typeface="Arial"/>
+            </a:endParaRPr>
+          </a:p>
+        </p:txBody>
+      </p:sp>
+      <p:sp>
+        <p:nvSpPr>
+          <p:cNvPr id="111" name="TextBox 10"/>
           <p:cNvSpPr/>
           <p:nvPr/>
         </p:nvSpPr>
         <p:spPr>
           <a:xfrm>
             <a:off x="3821760" y="2515680"/>
-            <a:ext cx="4483800" cy="713880"/>
+            <a:ext cx="4483440" cy="713520"/>
           </a:xfrm>
           <a:prstGeom prst="rect">
             <a:avLst/>
@@ -8524,22 +8110,22 @@
               </a:rPr>
               <a:t>2</a:t>
             </a:r>
-            <a:endParaRPr b="0" lang="ru-RU" sz="1100" spc="-1" strike="noStrike">
-              <a:latin typeface="Arial"/>
-            </a:endParaRPr>
-          </a:p>
-        </p:txBody>
-      </p:sp>
-      <p:sp>
-        <p:nvSpPr>
-          <p:cNvPr id="113" name="Прямоугольник: скругленные углы 26"/>
+            <a:endParaRPr b="0" lang="en-US" sz="1100" spc="-1" strike="noStrike">
+              <a:latin typeface="Arial"/>
+            </a:endParaRPr>
+          </a:p>
+        </p:txBody>
+      </p:sp>
+      <p:sp>
+        <p:nvSpPr>
+          <p:cNvPr id="112" name="Прямоугольник: скругленные углы 26"/>
           <p:cNvSpPr/>
           <p:nvPr/>
         </p:nvSpPr>
         <p:spPr>
           <a:xfrm>
             <a:off x="1135800" y="2433600"/>
-            <a:ext cx="2642760" cy="880920"/>
+            <a:ext cx="2642400" cy="880560"/>
           </a:xfrm>
           <a:prstGeom prst="roundRect">
             <a:avLst>
@@ -8570,14 +8156,14 @@
       </p:sp>
       <p:sp>
         <p:nvSpPr>
-          <p:cNvPr id="114" name="TextBox 10"/>
+          <p:cNvPr id="113" name="TextBox 10"/>
           <p:cNvSpPr/>
           <p:nvPr/>
         </p:nvSpPr>
         <p:spPr>
           <a:xfrm>
             <a:off x="1164600" y="2433600"/>
-            <a:ext cx="2546280" cy="880920"/>
+            <a:ext cx="2545920" cy="880560"/>
           </a:xfrm>
           <a:prstGeom prst="rect">
             <a:avLst/>
@@ -8624,22 +8210,22 @@
               </a:rPr>
               <a:t>2</a:t>
             </a:r>
-            <a:endParaRPr b="0" lang="ru-RU" sz="1400" spc="-1" strike="noStrike">
-              <a:latin typeface="Arial"/>
-            </a:endParaRPr>
-          </a:p>
-        </p:txBody>
-      </p:sp>
-      <p:sp>
-        <p:nvSpPr>
-          <p:cNvPr id="115" name="TextBox 10"/>
+            <a:endParaRPr b="0" lang="en-US" sz="1400" spc="-1" strike="noStrike">
+              <a:latin typeface="Arial"/>
+            </a:endParaRPr>
+          </a:p>
+        </p:txBody>
+      </p:sp>
+      <p:sp>
+        <p:nvSpPr>
+          <p:cNvPr id="114" name="TextBox 10"/>
           <p:cNvSpPr/>
           <p:nvPr/>
         </p:nvSpPr>
         <p:spPr>
           <a:xfrm>
             <a:off x="3821760" y="3913560"/>
-            <a:ext cx="4483800" cy="713880"/>
+            <a:ext cx="4483440" cy="713520"/>
           </a:xfrm>
           <a:prstGeom prst="rect">
             <a:avLst/>
@@ -8686,22 +8272,22 @@
               </a:rPr>
               <a:t>3</a:t>
             </a:r>
-            <a:endParaRPr b="0" lang="ru-RU" sz="1100" spc="-1" strike="noStrike">
-              <a:latin typeface="Arial"/>
-            </a:endParaRPr>
-          </a:p>
-        </p:txBody>
-      </p:sp>
-      <p:sp>
-        <p:nvSpPr>
-          <p:cNvPr id="116" name="Прямоугольник: скругленные углы 30"/>
+            <a:endParaRPr b="0" lang="en-US" sz="1100" spc="-1" strike="noStrike">
+              <a:latin typeface="Arial"/>
+            </a:endParaRPr>
+          </a:p>
+        </p:txBody>
+      </p:sp>
+      <p:sp>
+        <p:nvSpPr>
+          <p:cNvPr id="115" name="Прямоугольник: скругленные углы 30"/>
           <p:cNvSpPr/>
           <p:nvPr/>
         </p:nvSpPr>
         <p:spPr>
           <a:xfrm>
             <a:off x="1135800" y="3831480"/>
-            <a:ext cx="2642760" cy="880920"/>
+            <a:ext cx="2642400" cy="880560"/>
           </a:xfrm>
           <a:prstGeom prst="roundRect">
             <a:avLst>
@@ -8732,14 +8318,14 @@
       </p:sp>
       <p:sp>
         <p:nvSpPr>
-          <p:cNvPr id="117" name="TextBox 10"/>
+          <p:cNvPr id="116" name="TextBox 10"/>
           <p:cNvSpPr/>
           <p:nvPr/>
         </p:nvSpPr>
         <p:spPr>
           <a:xfrm>
             <a:off x="1164600" y="3831480"/>
-            <a:ext cx="2546280" cy="880920"/>
+            <a:ext cx="2545920" cy="880560"/>
           </a:xfrm>
           <a:prstGeom prst="rect">
             <a:avLst/>
@@ -8786,22 +8372,22 @@
               </a:rPr>
               <a:t>3</a:t>
             </a:r>
-            <a:endParaRPr b="0" lang="ru-RU" sz="1400" spc="-1" strike="noStrike">
-              <a:latin typeface="Arial"/>
-            </a:endParaRPr>
-          </a:p>
-        </p:txBody>
-      </p:sp>
-      <p:sp>
-        <p:nvSpPr>
-          <p:cNvPr id="118" name="Овал 5"/>
+            <a:endParaRPr b="0" lang="en-US" sz="1400" spc="-1" strike="noStrike">
+              <a:latin typeface="Arial"/>
+            </a:endParaRPr>
+          </a:p>
+        </p:txBody>
+      </p:sp>
+      <p:sp>
+        <p:nvSpPr>
+          <p:cNvPr id="117" name="Овал 5"/>
           <p:cNvSpPr/>
           <p:nvPr/>
         </p:nvSpPr>
         <p:spPr>
           <a:xfrm>
             <a:off x="675360" y="1365840"/>
-            <a:ext cx="221040" cy="221040"/>
+            <a:ext cx="220680" cy="220680"/>
           </a:xfrm>
           <a:prstGeom prst="ellipse">
             <a:avLst/>
@@ -8835,14 +8421,14 @@
       </p:sp>
       <p:sp>
         <p:nvSpPr>
-          <p:cNvPr id="119" name="Овал 33"/>
+          <p:cNvPr id="118" name="Овал 33"/>
           <p:cNvSpPr/>
           <p:nvPr/>
         </p:nvSpPr>
         <p:spPr>
           <a:xfrm>
             <a:off x="675360" y="2728080"/>
-            <a:ext cx="221040" cy="221040"/>
+            <a:ext cx="220680" cy="220680"/>
           </a:xfrm>
           <a:prstGeom prst="ellipse">
             <a:avLst/>
@@ -8876,14 +8462,14 @@
       </p:sp>
       <p:sp>
         <p:nvSpPr>
-          <p:cNvPr id="120" name="Овал 34"/>
+          <p:cNvPr id="119" name="Овал 34"/>
           <p:cNvSpPr/>
           <p:nvPr/>
         </p:nvSpPr>
         <p:spPr>
           <a:xfrm>
             <a:off x="671760" y="4156200"/>
-            <a:ext cx="221040" cy="221040"/>
+            <a:ext cx="220680" cy="220680"/>
           </a:xfrm>
           <a:prstGeom prst="ellipse">
             <a:avLst/>
@@ -8917,14 +8503,14 @@
       </p:sp>
       <p:sp>
         <p:nvSpPr>
-          <p:cNvPr id="121" name="TextBox 20"/>
+          <p:cNvPr id="120" name="TextBox 20"/>
           <p:cNvSpPr/>
           <p:nvPr/>
         </p:nvSpPr>
         <p:spPr>
           <a:xfrm>
             <a:off x="381600" y="271080"/>
-            <a:ext cx="8465760" cy="480960"/>
+            <a:ext cx="8465400" cy="480600"/>
           </a:xfrm>
           <a:prstGeom prst="rect">
             <a:avLst/>
@@ -8957,10 +8543,11 @@
                   <a:srgbClr val="ffffff"/>
                 </a:solidFill>
                 <a:latin typeface="Arial"/>
+                <a:ea typeface="DejaVu Sans"/>
               </a:rPr>
               <a:t>TITLE</a:t>
             </a:r>
-            <a:endParaRPr b="0" lang="ru-RU" sz="2200" spc="-1" strike="noStrike">
+            <a:endParaRPr b="0" lang="en-US" sz="2200" spc="-1" strike="noStrike">
               <a:latin typeface="Arial"/>
             </a:endParaRPr>
           </a:p>
@@ -9005,14 +8592,14 @@
       </p:grpSpPr>
       <p:sp>
         <p:nvSpPr>
-          <p:cNvPr id="122" name="Прямоугольник со скругленными углами 3"/>
+          <p:cNvPr id="121" name="Прямоугольник со скругленными углами 3"/>
           <p:cNvSpPr/>
           <p:nvPr/>
         </p:nvSpPr>
         <p:spPr>
           <a:xfrm>
             <a:off x="0" y="3181680"/>
-            <a:ext cx="9143640" cy="1961640"/>
+            <a:ext cx="9143280" cy="1961280"/>
           </a:xfrm>
           <a:prstGeom prst="roundRect">
             <a:avLst>
@@ -9063,22 +8650,22 @@
               </a:rPr>
               <a:t>PIC</a:t>
             </a:r>
-            <a:endParaRPr b="0" lang="ru-RU" sz="1800" spc="-1" strike="noStrike">
-              <a:latin typeface="Arial"/>
-            </a:endParaRPr>
-          </a:p>
-        </p:txBody>
-      </p:sp>
-      <p:sp>
-        <p:nvSpPr>
-          <p:cNvPr id="123" name="TextBox 10"/>
+            <a:endParaRPr b="0" lang="en-US" sz="1800" spc="-1" strike="noStrike">
+              <a:latin typeface="Arial"/>
+            </a:endParaRPr>
+          </a:p>
+        </p:txBody>
+      </p:sp>
+      <p:sp>
+        <p:nvSpPr>
+          <p:cNvPr id="122" name="TextBox 10"/>
           <p:cNvSpPr/>
           <p:nvPr/>
         </p:nvSpPr>
         <p:spPr>
           <a:xfrm>
             <a:off x="384840" y="801360"/>
-            <a:ext cx="2443680" cy="713880"/>
+            <a:ext cx="2443320" cy="713520"/>
           </a:xfrm>
           <a:prstGeom prst="rect">
             <a:avLst/>
@@ -9115,22 +8702,22 @@
               </a:rPr>
               <a:t>SUBTITLE1</a:t>
             </a:r>
-            <a:endParaRPr b="0" lang="ru-RU" sz="1400" spc="-1" strike="noStrike">
-              <a:latin typeface="Arial"/>
-            </a:endParaRPr>
-          </a:p>
-        </p:txBody>
-      </p:sp>
-      <p:sp>
-        <p:nvSpPr>
-          <p:cNvPr id="124" name="TextBox 10"/>
+            <a:endParaRPr b="0" lang="en-US" sz="1400" spc="-1" strike="noStrike">
+              <a:latin typeface="Arial"/>
+            </a:endParaRPr>
+          </a:p>
+        </p:txBody>
+      </p:sp>
+      <p:sp>
+        <p:nvSpPr>
+          <p:cNvPr id="123" name="TextBox 10"/>
           <p:cNvSpPr/>
           <p:nvPr/>
         </p:nvSpPr>
         <p:spPr>
           <a:xfrm>
             <a:off x="384840" y="1585800"/>
-            <a:ext cx="2443680" cy="1565280"/>
+            <a:ext cx="2443320" cy="1564920"/>
           </a:xfrm>
           <a:prstGeom prst="rect">
             <a:avLst/>
@@ -9177,22 +8764,22 @@
               </a:rPr>
               <a:t>1</a:t>
             </a:r>
-            <a:endParaRPr b="0" lang="ru-RU" sz="1100" spc="-1" strike="noStrike">
-              <a:latin typeface="Arial"/>
-            </a:endParaRPr>
-          </a:p>
-        </p:txBody>
-      </p:sp>
-      <p:sp>
-        <p:nvSpPr>
-          <p:cNvPr id="125" name="TextBox 10"/>
+            <a:endParaRPr b="0" lang="en-US" sz="1100" spc="-1" strike="noStrike">
+              <a:latin typeface="Arial"/>
+            </a:endParaRPr>
+          </a:p>
+        </p:txBody>
+      </p:sp>
+      <p:sp>
+        <p:nvSpPr>
+          <p:cNvPr id="124" name="TextBox 10"/>
           <p:cNvSpPr/>
           <p:nvPr/>
         </p:nvSpPr>
         <p:spPr>
           <a:xfrm>
             <a:off x="3269880" y="801360"/>
-            <a:ext cx="2443680" cy="713880"/>
+            <a:ext cx="2443320" cy="713520"/>
           </a:xfrm>
           <a:prstGeom prst="rect">
             <a:avLst/>
@@ -9229,22 +8816,22 @@
               </a:rPr>
               <a:t>SUBTITLE2</a:t>
             </a:r>
-            <a:endParaRPr b="0" lang="ru-RU" sz="1400" spc="-1" strike="noStrike">
-              <a:latin typeface="Arial"/>
-            </a:endParaRPr>
-          </a:p>
-        </p:txBody>
-      </p:sp>
-      <p:sp>
-        <p:nvSpPr>
-          <p:cNvPr id="126" name="TextBox 10"/>
+            <a:endParaRPr b="0" lang="en-US" sz="1400" spc="-1" strike="noStrike">
+              <a:latin typeface="Arial"/>
+            </a:endParaRPr>
+          </a:p>
+        </p:txBody>
+      </p:sp>
+      <p:sp>
+        <p:nvSpPr>
+          <p:cNvPr id="125" name="TextBox 10"/>
           <p:cNvSpPr/>
           <p:nvPr/>
         </p:nvSpPr>
         <p:spPr>
           <a:xfrm>
             <a:off x="3269880" y="1585800"/>
-            <a:ext cx="2443680" cy="1565280"/>
+            <a:ext cx="2443320" cy="1564920"/>
           </a:xfrm>
           <a:prstGeom prst="rect">
             <a:avLst/>
@@ -9291,22 +8878,22 @@
               </a:rPr>
               <a:t>2</a:t>
             </a:r>
-            <a:endParaRPr b="0" lang="ru-RU" sz="1100" spc="-1" strike="noStrike">
-              <a:latin typeface="Arial"/>
-            </a:endParaRPr>
-          </a:p>
-        </p:txBody>
-      </p:sp>
-      <p:sp>
-        <p:nvSpPr>
-          <p:cNvPr id="127" name="TextBox 10"/>
+            <a:endParaRPr b="0" lang="en-US" sz="1100" spc="-1" strike="noStrike">
+              <a:latin typeface="Arial"/>
+            </a:endParaRPr>
+          </a:p>
+        </p:txBody>
+      </p:sp>
+      <p:sp>
+        <p:nvSpPr>
+          <p:cNvPr id="126" name="TextBox 10"/>
           <p:cNvSpPr/>
           <p:nvPr/>
         </p:nvSpPr>
         <p:spPr>
           <a:xfrm>
             <a:off x="6154560" y="801360"/>
-            <a:ext cx="2665080" cy="713880"/>
+            <a:ext cx="2664720" cy="713520"/>
           </a:xfrm>
           <a:prstGeom prst="rect">
             <a:avLst/>
@@ -9343,22 +8930,22 @@
               </a:rPr>
               <a:t>SUBTITLE3</a:t>
             </a:r>
-            <a:endParaRPr b="0" lang="ru-RU" sz="1400" spc="-1" strike="noStrike">
-              <a:latin typeface="Arial"/>
-            </a:endParaRPr>
-          </a:p>
-        </p:txBody>
-      </p:sp>
-      <p:sp>
-        <p:nvSpPr>
-          <p:cNvPr id="128" name="TextBox 10"/>
+            <a:endParaRPr b="0" lang="en-US" sz="1400" spc="-1" strike="noStrike">
+              <a:latin typeface="Arial"/>
+            </a:endParaRPr>
+          </a:p>
+        </p:txBody>
+      </p:sp>
+      <p:sp>
+        <p:nvSpPr>
+          <p:cNvPr id="127" name="TextBox 10"/>
           <p:cNvSpPr/>
           <p:nvPr/>
         </p:nvSpPr>
         <p:spPr>
           <a:xfrm>
             <a:off x="6154560" y="1585800"/>
-            <a:ext cx="2665080" cy="1565280"/>
+            <a:ext cx="2664720" cy="1564920"/>
           </a:xfrm>
           <a:prstGeom prst="rect">
             <a:avLst/>
@@ -9405,22 +8992,22 @@
               </a:rPr>
               <a:t>3</a:t>
             </a:r>
-            <a:endParaRPr b="0" lang="ru-RU" sz="1100" spc="-1" strike="noStrike">
-              <a:latin typeface="Arial"/>
-            </a:endParaRPr>
-          </a:p>
-        </p:txBody>
-      </p:sp>
-      <p:sp>
-        <p:nvSpPr>
-          <p:cNvPr id="129" name="TextBox 13"/>
+            <a:endParaRPr b="0" lang="en-US" sz="1100" spc="-1" strike="noStrike">
+              <a:latin typeface="Arial"/>
+            </a:endParaRPr>
+          </a:p>
+        </p:txBody>
+      </p:sp>
+      <p:sp>
+        <p:nvSpPr>
+          <p:cNvPr id="128" name="TextBox 13"/>
           <p:cNvSpPr/>
           <p:nvPr/>
         </p:nvSpPr>
         <p:spPr>
           <a:xfrm>
             <a:off x="384840" y="268920"/>
-            <a:ext cx="8465760" cy="480960"/>
+            <a:ext cx="8465400" cy="480600"/>
           </a:xfrm>
           <a:prstGeom prst="rect">
             <a:avLst/>
@@ -9453,10 +9040,11 @@
                   <a:srgbClr val="ffffff"/>
                 </a:solidFill>
                 <a:latin typeface="Arial"/>
+                <a:ea typeface="DejaVu Sans"/>
               </a:rPr>
               <a:t>TITLE</a:t>
             </a:r>
-            <a:endParaRPr b="0" lang="ru-RU" sz="2200" spc="-1" strike="noStrike">
+            <a:endParaRPr b="0" lang="en-US" sz="2200" spc="-1" strike="noStrike">
               <a:latin typeface="Arial"/>
             </a:endParaRPr>
           </a:p>
@@ -9467,7 +9055,7 @@
               </a:lnSpc>
               <a:buNone/>
             </a:pPr>
-            <a:endParaRPr b="0" lang="ru-RU" sz="2200" spc="-1" strike="noStrike">
+            <a:endParaRPr b="0" lang="en-US" sz="2200" spc="-1" strike="noStrike">
               <a:latin typeface="Arial"/>
             </a:endParaRPr>
           </a:p>
@@ -9475,7 +9063,7 @@
       </p:sp>
       <p:grpSp>
         <p:nvGrpSpPr>
-          <p:cNvPr id="130" name="Группа 8"/>
+          <p:cNvPr id="129" name="Группа 8"/>
           <p:cNvGrpSpPr/>
           <p:nvPr/>
         </p:nvGrpSpPr>
@@ -9489,7 +9077,7 @@
         </p:grpSpPr>
         <p:sp>
           <p:nvSpPr>
-            <p:cNvPr id="131" name="Прямая соединительная линия 7"/>
+            <p:cNvPr id="130" name="Прямая соединительная линия 7"/>
             <p:cNvSpPr/>
             <p:nvPr/>
           </p:nvSpPr>
@@ -9522,7 +9110,7 @@
         </p:sp>
         <p:sp>
           <p:nvSpPr>
-            <p:cNvPr id="132" name="Прямая соединительная линия 22"/>
+            <p:cNvPr id="131" name="Прямая соединительная линия 22"/>
             <p:cNvSpPr/>
             <p:nvPr/>
           </p:nvSpPr>
@@ -9556,7 +9144,7 @@
       </p:grpSp>
       <p:grpSp>
         <p:nvGrpSpPr>
-          <p:cNvPr id="133" name="Группа 23"/>
+          <p:cNvPr id="132" name="Группа 23"/>
           <p:cNvGrpSpPr/>
           <p:nvPr/>
         </p:nvGrpSpPr>
@@ -9570,7 +9158,7 @@
         </p:grpSpPr>
         <p:sp>
           <p:nvSpPr>
-            <p:cNvPr id="134" name="Прямая соединительная линия 30"/>
+            <p:cNvPr id="133" name="Прямая соединительная линия 30"/>
             <p:cNvSpPr/>
             <p:nvPr/>
           </p:nvSpPr>
@@ -9603,7 +9191,7 @@
         </p:sp>
         <p:sp>
           <p:nvSpPr>
-            <p:cNvPr id="135" name="Прямая соединительная линия 31"/>
+            <p:cNvPr id="134" name="Прямая соединительная линия 31"/>
             <p:cNvSpPr/>
             <p:nvPr/>
           </p:nvSpPr>
@@ -9674,14 +9262,14 @@
       </p:grpSpPr>
       <p:sp>
         <p:nvSpPr>
-          <p:cNvPr id="136" name="Прямоугольник со скругленными углами 3"/>
+          <p:cNvPr id="135" name="Прямоугольник со скругленными углами 3"/>
           <p:cNvSpPr/>
           <p:nvPr/>
         </p:nvSpPr>
         <p:spPr>
           <a:xfrm>
             <a:off x="5884200" y="0"/>
-            <a:ext cx="3259440" cy="5143320"/>
+            <a:ext cx="3259080" cy="5142960"/>
           </a:xfrm>
           <a:prstGeom prst="roundRect">
             <a:avLst>
@@ -9732,22 +9320,22 @@
               </a:rPr>
               <a:t>PIC</a:t>
             </a:r>
-            <a:endParaRPr b="0" lang="ru-RU" sz="1800" spc="-1" strike="noStrike">
-              <a:latin typeface="Arial"/>
-            </a:endParaRPr>
-          </a:p>
-        </p:txBody>
-      </p:sp>
-      <p:sp>
-        <p:nvSpPr>
-          <p:cNvPr id="137" name="Прямоугольник: скругленные углы 12"/>
+            <a:endParaRPr b="0" lang="en-US" sz="1800" spc="-1" strike="noStrike">
+              <a:latin typeface="Arial"/>
+            </a:endParaRPr>
+          </a:p>
+        </p:txBody>
+      </p:sp>
+      <p:sp>
+        <p:nvSpPr>
+          <p:cNvPr id="136" name="Прямоугольник: скругленные углы 12"/>
           <p:cNvSpPr/>
           <p:nvPr/>
         </p:nvSpPr>
         <p:spPr>
           <a:xfrm>
             <a:off x="384840" y="3378240"/>
-            <a:ext cx="5236560" cy="1321200"/>
+            <a:ext cx="5236200" cy="1320840"/>
           </a:xfrm>
           <a:prstGeom prst="roundRect">
             <a:avLst>
@@ -9778,14 +9366,14 @@
       </p:sp>
       <p:sp>
         <p:nvSpPr>
-          <p:cNvPr id="138" name="Прямоугольник: скругленные углы 13"/>
+          <p:cNvPr id="137" name="Прямоугольник: скругленные углы 13"/>
           <p:cNvSpPr/>
           <p:nvPr/>
         </p:nvSpPr>
         <p:spPr>
           <a:xfrm>
             <a:off x="3091680" y="1135080"/>
-            <a:ext cx="2533320" cy="2057040"/>
+            <a:ext cx="2532960" cy="2056680"/>
           </a:xfrm>
           <a:prstGeom prst="roundRect">
             <a:avLst>
@@ -9816,14 +9404,14 @@
       </p:sp>
       <p:sp>
         <p:nvSpPr>
-          <p:cNvPr id="139" name="Прямоугольник: скругленные углы 14"/>
+          <p:cNvPr id="138" name="Прямоугольник: скругленные углы 14"/>
           <p:cNvSpPr/>
           <p:nvPr/>
         </p:nvSpPr>
         <p:spPr>
           <a:xfrm>
             <a:off x="387720" y="1120680"/>
-            <a:ext cx="2533320" cy="2057040"/>
+            <a:ext cx="2532960" cy="2056680"/>
           </a:xfrm>
           <a:prstGeom prst="roundRect">
             <a:avLst>
@@ -9854,14 +9442,14 @@
       </p:sp>
       <p:sp>
         <p:nvSpPr>
-          <p:cNvPr id="140" name="TextBox 10"/>
+          <p:cNvPr id="139" name="TextBox 10"/>
           <p:cNvSpPr/>
           <p:nvPr/>
         </p:nvSpPr>
         <p:spPr>
           <a:xfrm>
             <a:off x="476280" y="1176840"/>
-            <a:ext cx="2343600" cy="713880"/>
+            <a:ext cx="2343240" cy="713520"/>
           </a:xfrm>
           <a:prstGeom prst="rect">
             <a:avLst/>
@@ -9908,22 +9496,22 @@
               </a:rPr>
               <a:t>1</a:t>
             </a:r>
-            <a:endParaRPr b="0" lang="ru-RU" sz="1400" spc="-1" strike="noStrike">
-              <a:latin typeface="Arial"/>
-            </a:endParaRPr>
-          </a:p>
-        </p:txBody>
-      </p:sp>
-      <p:sp>
-        <p:nvSpPr>
-          <p:cNvPr id="141" name="TextBox 10"/>
+            <a:endParaRPr b="0" lang="en-US" sz="1400" spc="-1" strike="noStrike">
+              <a:latin typeface="Arial"/>
+            </a:endParaRPr>
+          </a:p>
+        </p:txBody>
+      </p:sp>
+      <p:sp>
+        <p:nvSpPr>
+          <p:cNvPr id="140" name="TextBox 10"/>
           <p:cNvSpPr/>
           <p:nvPr/>
         </p:nvSpPr>
         <p:spPr>
           <a:xfrm>
             <a:off x="476280" y="1961280"/>
-            <a:ext cx="2343600" cy="1142280"/>
+            <a:ext cx="2343240" cy="1141920"/>
           </a:xfrm>
           <a:prstGeom prst="rect">
             <a:avLst/>
@@ -9970,22 +9558,22 @@
               </a:rPr>
               <a:t>1</a:t>
             </a:r>
-            <a:endParaRPr b="0" lang="ru-RU" sz="1100" spc="-1" strike="noStrike">
-              <a:latin typeface="Arial"/>
-            </a:endParaRPr>
-          </a:p>
-        </p:txBody>
-      </p:sp>
-      <p:sp>
-        <p:nvSpPr>
-          <p:cNvPr id="142" name="TextBox 10"/>
+            <a:endParaRPr b="0" lang="en-US" sz="1100" spc="-1" strike="noStrike">
+              <a:latin typeface="Arial"/>
+            </a:endParaRPr>
+          </a:p>
+        </p:txBody>
+      </p:sp>
+      <p:sp>
+        <p:nvSpPr>
+          <p:cNvPr id="141" name="TextBox 10"/>
           <p:cNvSpPr/>
           <p:nvPr/>
         </p:nvSpPr>
         <p:spPr>
           <a:xfrm>
             <a:off x="3179880" y="1176840"/>
-            <a:ext cx="2340360" cy="713880"/>
+            <a:ext cx="2340000" cy="713520"/>
           </a:xfrm>
           <a:prstGeom prst="rect">
             <a:avLst/>
@@ -10022,22 +9610,22 @@
               </a:rPr>
               <a:t>SUBTITLE2</a:t>
             </a:r>
-            <a:endParaRPr b="0" lang="ru-RU" sz="1400" spc="-1" strike="noStrike">
-              <a:latin typeface="Arial"/>
-            </a:endParaRPr>
-          </a:p>
-        </p:txBody>
-      </p:sp>
-      <p:sp>
-        <p:nvSpPr>
-          <p:cNvPr id="143" name="TextBox 10"/>
+            <a:endParaRPr b="0" lang="en-US" sz="1400" spc="-1" strike="noStrike">
+              <a:latin typeface="Arial"/>
+            </a:endParaRPr>
+          </a:p>
+        </p:txBody>
+      </p:sp>
+      <p:sp>
+        <p:nvSpPr>
+          <p:cNvPr id="142" name="TextBox 10"/>
           <p:cNvSpPr/>
           <p:nvPr/>
         </p:nvSpPr>
         <p:spPr>
           <a:xfrm>
             <a:off x="3179880" y="1961280"/>
-            <a:ext cx="2340360" cy="1142280"/>
+            <a:ext cx="2340000" cy="1141920"/>
           </a:xfrm>
           <a:prstGeom prst="rect">
             <a:avLst/>
@@ -10084,22 +9672,22 @@
               </a:rPr>
               <a:t>2</a:t>
             </a:r>
-            <a:endParaRPr b="0" lang="ru-RU" sz="1100" spc="-1" strike="noStrike">
-              <a:latin typeface="Arial"/>
-            </a:endParaRPr>
-          </a:p>
-        </p:txBody>
-      </p:sp>
-      <p:sp>
-        <p:nvSpPr>
-          <p:cNvPr id="144" name="TextBox 10"/>
+            <a:endParaRPr b="0" lang="en-US" sz="1100" spc="-1" strike="noStrike">
+              <a:latin typeface="Arial"/>
+            </a:endParaRPr>
+          </a:p>
+        </p:txBody>
+      </p:sp>
+      <p:sp>
+        <p:nvSpPr>
+          <p:cNvPr id="143" name="TextBox 10"/>
           <p:cNvSpPr/>
           <p:nvPr/>
         </p:nvSpPr>
         <p:spPr>
           <a:xfrm>
             <a:off x="476280" y="3479760"/>
-            <a:ext cx="5236560" cy="329040"/>
+            <a:ext cx="5236200" cy="328680"/>
           </a:xfrm>
           <a:prstGeom prst="rect">
             <a:avLst/>
@@ -10136,22 +9724,22 @@
               </a:rPr>
               <a:t>SUBTITLE3</a:t>
             </a:r>
-            <a:endParaRPr b="0" lang="ru-RU" sz="1400" spc="-1" strike="noStrike">
-              <a:latin typeface="Arial"/>
-            </a:endParaRPr>
-          </a:p>
-        </p:txBody>
-      </p:sp>
-      <p:sp>
-        <p:nvSpPr>
-          <p:cNvPr id="145" name="TextBox 10"/>
+            <a:endParaRPr b="0" lang="en-US" sz="1400" spc="-1" strike="noStrike">
+              <a:latin typeface="Arial"/>
+            </a:endParaRPr>
+          </a:p>
+        </p:txBody>
+      </p:sp>
+      <p:sp>
+        <p:nvSpPr>
+          <p:cNvPr id="144" name="TextBox 10"/>
           <p:cNvSpPr/>
           <p:nvPr/>
         </p:nvSpPr>
         <p:spPr>
           <a:xfrm>
             <a:off x="476280" y="3831480"/>
-            <a:ext cx="5146920" cy="713880"/>
+            <a:ext cx="5146560" cy="713520"/>
           </a:xfrm>
           <a:prstGeom prst="rect">
             <a:avLst/>
@@ -10198,22 +9786,22 @@
               </a:rPr>
               <a:t>3</a:t>
             </a:r>
-            <a:endParaRPr b="0" lang="ru-RU" sz="1100" spc="-1" strike="noStrike">
-              <a:latin typeface="Arial"/>
-            </a:endParaRPr>
-          </a:p>
-        </p:txBody>
-      </p:sp>
-      <p:sp>
-        <p:nvSpPr>
-          <p:cNvPr id="146" name="TextBox 20"/>
+            <a:endParaRPr b="0" lang="en-US" sz="1100" spc="-1" strike="noStrike">
+              <a:latin typeface="Arial"/>
+            </a:endParaRPr>
+          </a:p>
+        </p:txBody>
+      </p:sp>
+      <p:sp>
+        <p:nvSpPr>
+          <p:cNvPr id="145" name="TextBox 20"/>
           <p:cNvSpPr/>
           <p:nvPr/>
         </p:nvSpPr>
         <p:spPr>
           <a:xfrm>
             <a:off x="338760" y="160560"/>
-            <a:ext cx="5282640" cy="927720"/>
+            <a:ext cx="5282280" cy="927360"/>
           </a:xfrm>
           <a:prstGeom prst="rect">
             <a:avLst/>
@@ -10246,10 +9834,11 @@
                   <a:srgbClr val="ffffff"/>
                 </a:solidFill>
                 <a:latin typeface="Arial"/>
+                <a:ea typeface="DejaVu Sans"/>
               </a:rPr>
               <a:t>TITLE</a:t>
             </a:r>
-            <a:endParaRPr b="0" lang="ru-RU" sz="2200" spc="-1" strike="noStrike">
+            <a:endParaRPr b="0" lang="en-US" sz="2200" spc="-1" strike="noStrike">
               <a:latin typeface="Arial"/>
             </a:endParaRPr>
           </a:p>
